--- a/UK Train Rides New.pptx
+++ b/UK Train Rides New.pptx
@@ -5,7 +5,7 @@
     <p:sldMasterId id="2147483680" r:id="rId1"/>
   </p:sldMasterIdLst>
   <p:notesMasterIdLst>
-    <p:notesMasterId r:id="rId14"/>
+    <p:notesMasterId r:id="rId19"/>
   </p:notesMasterIdLst>
   <p:sldIdLst>
     <p:sldId id="256" r:id="rId2"/>
@@ -18,28 +18,33 @@
     <p:sldId id="263" r:id="rId9"/>
     <p:sldId id="299" r:id="rId10"/>
     <p:sldId id="268" r:id="rId11"/>
-    <p:sldId id="301" r:id="rId12"/>
-    <p:sldId id="302" r:id="rId13"/>
+    <p:sldId id="303" r:id="rId12"/>
+    <p:sldId id="304" r:id="rId13"/>
+    <p:sldId id="305" r:id="rId14"/>
+    <p:sldId id="306" r:id="rId15"/>
+    <p:sldId id="301" r:id="rId16"/>
+    <p:sldId id="302" r:id="rId17"/>
+    <p:sldId id="307" r:id="rId18"/>
   </p:sldIdLst>
   <p:sldSz cx="9144000" cy="5143500" type="screen16x9"/>
   <p:notesSz cx="6858000" cy="9144000"/>
   <p:embeddedFontLst>
     <p:embeddedFont>
       <p:font typeface="Anaheim" panose="020B0604020202020204" charset="0"/>
-      <p:regular r:id="rId15"/>
-      <p:bold r:id="rId16"/>
+      <p:regular r:id="rId20"/>
+      <p:bold r:id="rId21"/>
     </p:embeddedFont>
     <p:embeddedFont>
       <p:font typeface="Nunito Light" pitchFamily="2" charset="0"/>
-      <p:regular r:id="rId17"/>
-      <p:italic r:id="rId18"/>
+      <p:regular r:id="rId22"/>
+      <p:italic r:id="rId23"/>
     </p:embeddedFont>
     <p:embeddedFont>
       <p:font typeface="Poppins" panose="00000500000000000000" pitchFamily="2" charset="0"/>
-      <p:regular r:id="rId19"/>
-      <p:bold r:id="rId20"/>
-      <p:italic r:id="rId21"/>
-      <p:boldItalic r:id="rId22"/>
+      <p:regular r:id="rId24"/>
+      <p:bold r:id="rId25"/>
+      <p:italic r:id="rId26"/>
+      <p:boldItalic r:id="rId27"/>
     </p:embeddedFont>
   </p:embeddedFontLst>
   <p:defaultTextStyle>
@@ -933,6 +938,514 @@
   <p:cSld>
     <p:spTree>
       <p:nvGrpSpPr>
+        <p:cNvPr id="1" name="Shape 399">
+          <a:extLst>
+            <a:ext uri="{FF2B5EF4-FFF2-40B4-BE49-F238E27FC236}">
+              <a16:creationId xmlns:a16="http://schemas.microsoft.com/office/drawing/2014/main" id="{311735E5-0F32-C061-83B5-A60B54D2B0EB}"/>
+            </a:ext>
+          </a:extLst>
+        </p:cNvPr>
+        <p:cNvGrpSpPr/>
+        <p:nvPr/>
+      </p:nvGrpSpPr>
+      <p:grpSpPr>
+        <a:xfrm>
+          <a:off x="0" y="0"/>
+          <a:ext cx="0" cy="0"/>
+          <a:chOff x="0" y="0"/>
+          <a:chExt cx="0" cy="0"/>
+        </a:xfrm>
+      </p:grpSpPr>
+      <p:sp>
+        <p:nvSpPr>
+          <p:cNvPr id="400" name="Google Shape;400;g184d99d1a72_0_15:notes">
+            <a:extLst>
+              <a:ext uri="{FF2B5EF4-FFF2-40B4-BE49-F238E27FC236}">
+                <a16:creationId xmlns:a16="http://schemas.microsoft.com/office/drawing/2014/main" id="{E0C059CF-AB49-E65F-9668-9941A77537B5}"/>
+              </a:ext>
+            </a:extLst>
+          </p:cNvPr>
+          <p:cNvSpPr>
+            <a:spLocks noGrp="1" noRot="1" noChangeAspect="1"/>
+          </p:cNvSpPr>
+          <p:nvPr>
+            <p:ph type="sldImg" idx="2"/>
+          </p:nvPr>
+        </p:nvSpPr>
+        <p:spPr>
+          <a:xfrm>
+            <a:off x="381000" y="685800"/>
+            <a:ext cx="6096000" cy="3429000"/>
+          </a:xfrm>
+          <a:custGeom>
+            <a:avLst/>
+            <a:gdLst/>
+            <a:ahLst/>
+            <a:cxnLst/>
+            <a:rect l="l" t="t" r="r" b="b"/>
+            <a:pathLst>
+              <a:path w="120000" h="120000" extrusionOk="0">
+                <a:moveTo>
+                  <a:pt x="0" y="0"/>
+                </a:moveTo>
+                <a:lnTo>
+                  <a:pt x="120000" y="0"/>
+                </a:lnTo>
+                <a:lnTo>
+                  <a:pt x="120000" y="120000"/>
+                </a:lnTo>
+                <a:lnTo>
+                  <a:pt x="0" y="120000"/>
+                </a:lnTo>
+                <a:close/>
+              </a:path>
+            </a:pathLst>
+          </a:custGeom>
+        </p:spPr>
+      </p:sp>
+      <p:sp>
+        <p:nvSpPr>
+          <p:cNvPr id="401" name="Google Shape;401;g184d99d1a72_0_15:notes">
+            <a:extLst>
+              <a:ext uri="{FF2B5EF4-FFF2-40B4-BE49-F238E27FC236}">
+                <a16:creationId xmlns:a16="http://schemas.microsoft.com/office/drawing/2014/main" id="{165B38D2-89C2-1ACD-8DFD-ADCB0EDB9B39}"/>
+              </a:ext>
+            </a:extLst>
+          </p:cNvPr>
+          <p:cNvSpPr txBox="1">
+            <a:spLocks noGrp="1"/>
+          </p:cNvSpPr>
+          <p:nvPr>
+            <p:ph type="body" idx="1"/>
+          </p:nvPr>
+        </p:nvSpPr>
+        <p:spPr>
+          <a:xfrm>
+            <a:off x="685800" y="4343400"/>
+            <a:ext cx="5486400" cy="4114800"/>
+          </a:xfrm>
+          <a:prstGeom prst="rect">
+            <a:avLst/>
+          </a:prstGeom>
+        </p:spPr>
+        <p:txBody>
+          <a:bodyPr spcFirstLastPara="1" wrap="square" lIns="91425" tIns="91425" rIns="91425" bIns="91425" anchor="t" anchorCtr="0">
+            <a:noAutofit/>
+          </a:bodyPr>
+          <a:lstStyle/>
+          <a:p>
+            <a:pPr marL="0" lvl="0" indent="0" algn="l" rtl="0">
+              <a:spcBef>
+                <a:spcPts val="0"/>
+              </a:spcBef>
+              <a:spcAft>
+                <a:spcPts val="0"/>
+              </a:spcAft>
+              <a:buNone/>
+            </a:pPr>
+            <a:endParaRPr/>
+          </a:p>
+        </p:txBody>
+      </p:sp>
+    </p:spTree>
+    <p:extLst>
+      <p:ext uri="{BB962C8B-B14F-4D97-AF65-F5344CB8AC3E}">
+        <p14:creationId xmlns:p14="http://schemas.microsoft.com/office/powerpoint/2010/main" val="1304393132"/>
+      </p:ext>
+    </p:extLst>
+  </p:cSld>
+  <p:clrMapOvr>
+    <a:masterClrMapping/>
+  </p:clrMapOvr>
+</p:notes>
+</file>
+
+<file path=ppt/notesSlides/notesSlide12.xml><?xml version="1.0" encoding="utf-8"?>
+<p:notes xmlns:a="http://schemas.openxmlformats.org/drawingml/2006/main" xmlns:r="http://schemas.openxmlformats.org/officeDocument/2006/relationships" xmlns:p="http://schemas.openxmlformats.org/presentationml/2006/main" showMasterSp="0" showMasterPhAnim="0">
+  <p:cSld>
+    <p:spTree>
+      <p:nvGrpSpPr>
+        <p:cNvPr id="1" name="Shape 399">
+          <a:extLst>
+            <a:ext uri="{FF2B5EF4-FFF2-40B4-BE49-F238E27FC236}">
+              <a16:creationId xmlns:a16="http://schemas.microsoft.com/office/drawing/2014/main" id="{C736BDCE-15BF-4123-0EC2-F9B4FA61E413}"/>
+            </a:ext>
+          </a:extLst>
+        </p:cNvPr>
+        <p:cNvGrpSpPr/>
+        <p:nvPr/>
+      </p:nvGrpSpPr>
+      <p:grpSpPr>
+        <a:xfrm>
+          <a:off x="0" y="0"/>
+          <a:ext cx="0" cy="0"/>
+          <a:chOff x="0" y="0"/>
+          <a:chExt cx="0" cy="0"/>
+        </a:xfrm>
+      </p:grpSpPr>
+      <p:sp>
+        <p:nvSpPr>
+          <p:cNvPr id="400" name="Google Shape;400;g184d99d1a72_0_15:notes">
+            <a:extLst>
+              <a:ext uri="{FF2B5EF4-FFF2-40B4-BE49-F238E27FC236}">
+                <a16:creationId xmlns:a16="http://schemas.microsoft.com/office/drawing/2014/main" id="{8F50B047-F697-99BB-7CF4-69FC3118C676}"/>
+              </a:ext>
+            </a:extLst>
+          </p:cNvPr>
+          <p:cNvSpPr>
+            <a:spLocks noGrp="1" noRot="1" noChangeAspect="1"/>
+          </p:cNvSpPr>
+          <p:nvPr>
+            <p:ph type="sldImg" idx="2"/>
+          </p:nvPr>
+        </p:nvSpPr>
+        <p:spPr>
+          <a:xfrm>
+            <a:off x="381000" y="685800"/>
+            <a:ext cx="6096000" cy="3429000"/>
+          </a:xfrm>
+          <a:custGeom>
+            <a:avLst/>
+            <a:gdLst/>
+            <a:ahLst/>
+            <a:cxnLst/>
+            <a:rect l="l" t="t" r="r" b="b"/>
+            <a:pathLst>
+              <a:path w="120000" h="120000" extrusionOk="0">
+                <a:moveTo>
+                  <a:pt x="0" y="0"/>
+                </a:moveTo>
+                <a:lnTo>
+                  <a:pt x="120000" y="0"/>
+                </a:lnTo>
+                <a:lnTo>
+                  <a:pt x="120000" y="120000"/>
+                </a:lnTo>
+                <a:lnTo>
+                  <a:pt x="0" y="120000"/>
+                </a:lnTo>
+                <a:close/>
+              </a:path>
+            </a:pathLst>
+          </a:custGeom>
+        </p:spPr>
+      </p:sp>
+      <p:sp>
+        <p:nvSpPr>
+          <p:cNvPr id="401" name="Google Shape;401;g184d99d1a72_0_15:notes">
+            <a:extLst>
+              <a:ext uri="{FF2B5EF4-FFF2-40B4-BE49-F238E27FC236}">
+                <a16:creationId xmlns:a16="http://schemas.microsoft.com/office/drawing/2014/main" id="{558D36D6-5129-4F75-4B78-6B7DF030B359}"/>
+              </a:ext>
+            </a:extLst>
+          </p:cNvPr>
+          <p:cNvSpPr txBox="1">
+            <a:spLocks noGrp="1"/>
+          </p:cNvSpPr>
+          <p:nvPr>
+            <p:ph type="body" idx="1"/>
+          </p:nvPr>
+        </p:nvSpPr>
+        <p:spPr>
+          <a:xfrm>
+            <a:off x="685800" y="4343400"/>
+            <a:ext cx="5486400" cy="4114800"/>
+          </a:xfrm>
+          <a:prstGeom prst="rect">
+            <a:avLst/>
+          </a:prstGeom>
+        </p:spPr>
+        <p:txBody>
+          <a:bodyPr spcFirstLastPara="1" wrap="square" lIns="91425" tIns="91425" rIns="91425" bIns="91425" anchor="t" anchorCtr="0">
+            <a:noAutofit/>
+          </a:bodyPr>
+          <a:lstStyle/>
+          <a:p>
+            <a:pPr marL="0" lvl="0" indent="0" algn="l" rtl="0">
+              <a:spcBef>
+                <a:spcPts val="0"/>
+              </a:spcBef>
+              <a:spcAft>
+                <a:spcPts val="0"/>
+              </a:spcAft>
+              <a:buNone/>
+            </a:pPr>
+            <a:endParaRPr/>
+          </a:p>
+        </p:txBody>
+      </p:sp>
+    </p:spTree>
+    <p:extLst>
+      <p:ext uri="{BB962C8B-B14F-4D97-AF65-F5344CB8AC3E}">
+        <p14:creationId xmlns:p14="http://schemas.microsoft.com/office/powerpoint/2010/main" val="245685735"/>
+      </p:ext>
+    </p:extLst>
+  </p:cSld>
+  <p:clrMapOvr>
+    <a:masterClrMapping/>
+  </p:clrMapOvr>
+</p:notes>
+</file>
+
+<file path=ppt/notesSlides/notesSlide13.xml><?xml version="1.0" encoding="utf-8"?>
+<p:notes xmlns:a="http://schemas.openxmlformats.org/drawingml/2006/main" xmlns:r="http://schemas.openxmlformats.org/officeDocument/2006/relationships" xmlns:p="http://schemas.openxmlformats.org/presentationml/2006/main" showMasterSp="0" showMasterPhAnim="0">
+  <p:cSld>
+    <p:spTree>
+      <p:nvGrpSpPr>
+        <p:cNvPr id="1" name="Shape 399">
+          <a:extLst>
+            <a:ext uri="{FF2B5EF4-FFF2-40B4-BE49-F238E27FC236}">
+              <a16:creationId xmlns:a16="http://schemas.microsoft.com/office/drawing/2014/main" id="{C6223F84-C228-EEA9-5D6A-D5B4730AB4DE}"/>
+            </a:ext>
+          </a:extLst>
+        </p:cNvPr>
+        <p:cNvGrpSpPr/>
+        <p:nvPr/>
+      </p:nvGrpSpPr>
+      <p:grpSpPr>
+        <a:xfrm>
+          <a:off x="0" y="0"/>
+          <a:ext cx="0" cy="0"/>
+          <a:chOff x="0" y="0"/>
+          <a:chExt cx="0" cy="0"/>
+        </a:xfrm>
+      </p:grpSpPr>
+      <p:sp>
+        <p:nvSpPr>
+          <p:cNvPr id="400" name="Google Shape;400;g184d99d1a72_0_15:notes">
+            <a:extLst>
+              <a:ext uri="{FF2B5EF4-FFF2-40B4-BE49-F238E27FC236}">
+                <a16:creationId xmlns:a16="http://schemas.microsoft.com/office/drawing/2014/main" id="{2038818D-A7BD-7E92-7108-085702BB1974}"/>
+              </a:ext>
+            </a:extLst>
+          </p:cNvPr>
+          <p:cNvSpPr>
+            <a:spLocks noGrp="1" noRot="1" noChangeAspect="1"/>
+          </p:cNvSpPr>
+          <p:nvPr>
+            <p:ph type="sldImg" idx="2"/>
+          </p:nvPr>
+        </p:nvSpPr>
+        <p:spPr>
+          <a:xfrm>
+            <a:off x="381000" y="685800"/>
+            <a:ext cx="6096000" cy="3429000"/>
+          </a:xfrm>
+          <a:custGeom>
+            <a:avLst/>
+            <a:gdLst/>
+            <a:ahLst/>
+            <a:cxnLst/>
+            <a:rect l="l" t="t" r="r" b="b"/>
+            <a:pathLst>
+              <a:path w="120000" h="120000" extrusionOk="0">
+                <a:moveTo>
+                  <a:pt x="0" y="0"/>
+                </a:moveTo>
+                <a:lnTo>
+                  <a:pt x="120000" y="0"/>
+                </a:lnTo>
+                <a:lnTo>
+                  <a:pt x="120000" y="120000"/>
+                </a:lnTo>
+                <a:lnTo>
+                  <a:pt x="0" y="120000"/>
+                </a:lnTo>
+                <a:close/>
+              </a:path>
+            </a:pathLst>
+          </a:custGeom>
+        </p:spPr>
+      </p:sp>
+      <p:sp>
+        <p:nvSpPr>
+          <p:cNvPr id="401" name="Google Shape;401;g184d99d1a72_0_15:notes">
+            <a:extLst>
+              <a:ext uri="{FF2B5EF4-FFF2-40B4-BE49-F238E27FC236}">
+                <a16:creationId xmlns:a16="http://schemas.microsoft.com/office/drawing/2014/main" id="{DBA02B5F-F593-691F-D948-0A903BC6C45E}"/>
+              </a:ext>
+            </a:extLst>
+          </p:cNvPr>
+          <p:cNvSpPr txBox="1">
+            <a:spLocks noGrp="1"/>
+          </p:cNvSpPr>
+          <p:nvPr>
+            <p:ph type="body" idx="1"/>
+          </p:nvPr>
+        </p:nvSpPr>
+        <p:spPr>
+          <a:xfrm>
+            <a:off x="685800" y="4343400"/>
+            <a:ext cx="5486400" cy="4114800"/>
+          </a:xfrm>
+          <a:prstGeom prst="rect">
+            <a:avLst/>
+          </a:prstGeom>
+        </p:spPr>
+        <p:txBody>
+          <a:bodyPr spcFirstLastPara="1" wrap="square" lIns="91425" tIns="91425" rIns="91425" bIns="91425" anchor="t" anchorCtr="0">
+            <a:noAutofit/>
+          </a:bodyPr>
+          <a:lstStyle/>
+          <a:p>
+            <a:pPr marL="0" lvl="0" indent="0" algn="l" rtl="0">
+              <a:spcBef>
+                <a:spcPts val="0"/>
+              </a:spcBef>
+              <a:spcAft>
+                <a:spcPts val="0"/>
+              </a:spcAft>
+              <a:buNone/>
+            </a:pPr>
+            <a:endParaRPr/>
+          </a:p>
+        </p:txBody>
+      </p:sp>
+    </p:spTree>
+    <p:extLst>
+      <p:ext uri="{BB962C8B-B14F-4D97-AF65-F5344CB8AC3E}">
+        <p14:creationId xmlns:p14="http://schemas.microsoft.com/office/powerpoint/2010/main" val="647396308"/>
+      </p:ext>
+    </p:extLst>
+  </p:cSld>
+  <p:clrMapOvr>
+    <a:masterClrMapping/>
+  </p:clrMapOvr>
+</p:notes>
+</file>
+
+<file path=ppt/notesSlides/notesSlide14.xml><?xml version="1.0" encoding="utf-8"?>
+<p:notes xmlns:a="http://schemas.openxmlformats.org/drawingml/2006/main" xmlns:r="http://schemas.openxmlformats.org/officeDocument/2006/relationships" xmlns:p="http://schemas.openxmlformats.org/presentationml/2006/main" showMasterSp="0" showMasterPhAnim="0">
+  <p:cSld>
+    <p:spTree>
+      <p:nvGrpSpPr>
+        <p:cNvPr id="1" name="Shape 399">
+          <a:extLst>
+            <a:ext uri="{FF2B5EF4-FFF2-40B4-BE49-F238E27FC236}">
+              <a16:creationId xmlns:a16="http://schemas.microsoft.com/office/drawing/2014/main" id="{A1026B77-16FD-63D0-AE1F-FAD01A6B9D01}"/>
+            </a:ext>
+          </a:extLst>
+        </p:cNvPr>
+        <p:cNvGrpSpPr/>
+        <p:nvPr/>
+      </p:nvGrpSpPr>
+      <p:grpSpPr>
+        <a:xfrm>
+          <a:off x="0" y="0"/>
+          <a:ext cx="0" cy="0"/>
+          <a:chOff x="0" y="0"/>
+          <a:chExt cx="0" cy="0"/>
+        </a:xfrm>
+      </p:grpSpPr>
+      <p:sp>
+        <p:nvSpPr>
+          <p:cNvPr id="400" name="Google Shape;400;g184d99d1a72_0_15:notes">
+            <a:extLst>
+              <a:ext uri="{FF2B5EF4-FFF2-40B4-BE49-F238E27FC236}">
+                <a16:creationId xmlns:a16="http://schemas.microsoft.com/office/drawing/2014/main" id="{6D9C9D1F-FB6F-F75E-CE46-5F13A7E4C3BF}"/>
+              </a:ext>
+            </a:extLst>
+          </p:cNvPr>
+          <p:cNvSpPr>
+            <a:spLocks noGrp="1" noRot="1" noChangeAspect="1"/>
+          </p:cNvSpPr>
+          <p:nvPr>
+            <p:ph type="sldImg" idx="2"/>
+          </p:nvPr>
+        </p:nvSpPr>
+        <p:spPr>
+          <a:xfrm>
+            <a:off x="381000" y="685800"/>
+            <a:ext cx="6096000" cy="3429000"/>
+          </a:xfrm>
+          <a:custGeom>
+            <a:avLst/>
+            <a:gdLst/>
+            <a:ahLst/>
+            <a:cxnLst/>
+            <a:rect l="l" t="t" r="r" b="b"/>
+            <a:pathLst>
+              <a:path w="120000" h="120000" extrusionOk="0">
+                <a:moveTo>
+                  <a:pt x="0" y="0"/>
+                </a:moveTo>
+                <a:lnTo>
+                  <a:pt x="120000" y="0"/>
+                </a:lnTo>
+                <a:lnTo>
+                  <a:pt x="120000" y="120000"/>
+                </a:lnTo>
+                <a:lnTo>
+                  <a:pt x="0" y="120000"/>
+                </a:lnTo>
+                <a:close/>
+              </a:path>
+            </a:pathLst>
+          </a:custGeom>
+        </p:spPr>
+      </p:sp>
+      <p:sp>
+        <p:nvSpPr>
+          <p:cNvPr id="401" name="Google Shape;401;g184d99d1a72_0_15:notes">
+            <a:extLst>
+              <a:ext uri="{FF2B5EF4-FFF2-40B4-BE49-F238E27FC236}">
+                <a16:creationId xmlns:a16="http://schemas.microsoft.com/office/drawing/2014/main" id="{FA58FA2E-BD64-D437-002D-AC5864DFA3AA}"/>
+              </a:ext>
+            </a:extLst>
+          </p:cNvPr>
+          <p:cNvSpPr txBox="1">
+            <a:spLocks noGrp="1"/>
+          </p:cNvSpPr>
+          <p:nvPr>
+            <p:ph type="body" idx="1"/>
+          </p:nvPr>
+        </p:nvSpPr>
+        <p:spPr>
+          <a:xfrm>
+            <a:off x="685800" y="4343400"/>
+            <a:ext cx="5486400" cy="4114800"/>
+          </a:xfrm>
+          <a:prstGeom prst="rect">
+            <a:avLst/>
+          </a:prstGeom>
+        </p:spPr>
+        <p:txBody>
+          <a:bodyPr spcFirstLastPara="1" wrap="square" lIns="91425" tIns="91425" rIns="91425" bIns="91425" anchor="t" anchorCtr="0">
+            <a:noAutofit/>
+          </a:bodyPr>
+          <a:lstStyle/>
+          <a:p>
+            <a:pPr marL="0" lvl="0" indent="0" algn="l" rtl="0">
+              <a:spcBef>
+                <a:spcPts val="0"/>
+              </a:spcBef>
+              <a:spcAft>
+                <a:spcPts val="0"/>
+              </a:spcAft>
+              <a:buNone/>
+            </a:pPr>
+            <a:endParaRPr/>
+          </a:p>
+        </p:txBody>
+      </p:sp>
+    </p:spTree>
+    <p:extLst>
+      <p:ext uri="{BB962C8B-B14F-4D97-AF65-F5344CB8AC3E}">
+        <p14:creationId xmlns:p14="http://schemas.microsoft.com/office/powerpoint/2010/main" val="3050640661"/>
+      </p:ext>
+    </p:extLst>
+  </p:cSld>
+  <p:clrMapOvr>
+    <a:masterClrMapping/>
+  </p:clrMapOvr>
+</p:notes>
+</file>
+
+<file path=ppt/notesSlides/notesSlide15.xml><?xml version="1.0" encoding="utf-8"?>
+<p:notes xmlns:a="http://schemas.openxmlformats.org/drawingml/2006/main" xmlns:r="http://schemas.openxmlformats.org/officeDocument/2006/relationships" xmlns:p="http://schemas.openxmlformats.org/presentationml/2006/main" showMasterSp="0" showMasterPhAnim="0">
+  <p:cSld>
+    <p:spTree>
+      <p:nvGrpSpPr>
         <p:cNvPr id="1" name="Shape 485">
           <a:extLst>
             <a:ext uri="{FF2B5EF4-FFF2-40B4-BE49-F238E27FC236}">
@@ -1055,7 +1568,7 @@
 </p:notes>
 </file>
 
-<file path=ppt/notesSlides/notesSlide12.xml><?xml version="1.0" encoding="utf-8"?>
+<file path=ppt/notesSlides/notesSlide16.xml><?xml version="1.0" encoding="utf-8"?>
 <p:notes xmlns:a="http://schemas.openxmlformats.org/drawingml/2006/main" xmlns:r="http://schemas.openxmlformats.org/officeDocument/2006/relationships" xmlns:p="http://schemas.openxmlformats.org/presentationml/2006/main" showMasterSp="0" showMasterPhAnim="0">
   <p:cSld>
     <p:spTree>
@@ -3126,6 +3639,13 @@
             <a:noFill/>
           </a:ln>
         </p:spPr>
+        <p:txBody>
+          <a:bodyPr/>
+          <a:lstStyle/>
+          <a:p>
+            <a:endParaRPr lang="en-US"/>
+          </a:p>
+        </p:txBody>
       </p:sp>
       <p:pic>
         <p:nvPicPr>
@@ -12277,10 +12797,10 @@
       </p:sp>
       <p:pic>
         <p:nvPicPr>
-          <p:cNvPr id="2" name="Picture 1" descr="A screenshot of a computer">
+          <p:cNvPr id="3" name="Picture 2" descr="A screenshot of a computer">
             <a:extLst>
               <a:ext uri="{FF2B5EF4-FFF2-40B4-BE49-F238E27FC236}">
-                <a16:creationId xmlns:a16="http://schemas.microsoft.com/office/drawing/2014/main" id="{827CF99E-8BCC-4111-318E-96AE139969F8}"/>
+                <a16:creationId xmlns:a16="http://schemas.microsoft.com/office/drawing/2014/main" id="{7F6CA048-587A-D26F-C7E6-87B60EF3845A}"/>
               </a:ext>
             </a:extLst>
           </p:cNvPr>
@@ -12290,21 +12810,15 @@
           <p:nvPr/>
         </p:nvPicPr>
         <p:blipFill>
-          <a:blip r:embed="rId3">
-            <a:extLst>
-              <a:ext uri="{28A0092B-C50C-407E-A947-70E740481C1C}">
-                <a14:useLocalDpi xmlns:a14="http://schemas.microsoft.com/office/drawing/2010/main" val="0"/>
-              </a:ext>
-            </a:extLst>
-          </a:blip>
+          <a:blip r:embed="rId3"/>
           <a:stretch>
             <a:fillRect/>
           </a:stretch>
         </p:blipFill>
         <p:spPr>
           <a:xfrm>
-            <a:off x="1184412" y="1285103"/>
-            <a:ext cx="6775175" cy="3579488"/>
+            <a:off x="832624" y="1191258"/>
+            <a:ext cx="7530791" cy="3579488"/>
           </a:xfrm>
           <a:prstGeom prst="rect">
             <a:avLst/>
@@ -12438,6 +12952,497 @@
                       </p:childTnLst>
                     </p:cTn>
                   </p:par>
+                </p:childTnLst>
+              </p:cTn>
+              <p:prevCondLst>
+                <p:cond evt="onPrev" delay="0">
+                  <p:tgtEl>
+                    <p:sldTgt/>
+                  </p:tgtEl>
+                </p:cond>
+              </p:prevCondLst>
+              <p:nextCondLst>
+                <p:cond evt="onNext" delay="0">
+                  <p:tgtEl>
+                    <p:sldTgt/>
+                  </p:tgtEl>
+                </p:cond>
+              </p:nextCondLst>
+            </p:seq>
+          </p:childTnLst>
+        </p:cTn>
+      </p:par>
+    </p:tnLst>
+    <p:bldLst>
+      <p:bldP spid="490" grpId="0"/>
+    </p:bldLst>
+  </p:timing>
+</p:sld>
+</file>
+
+<file path=ppt/slides/slide11.xml><?xml version="1.0" encoding="utf-8"?>
+<p:sld xmlns:a="http://schemas.openxmlformats.org/drawingml/2006/main" xmlns:r="http://schemas.openxmlformats.org/officeDocument/2006/relationships" xmlns:p="http://schemas.openxmlformats.org/presentationml/2006/main">
+  <p:cSld>
+    <p:spTree>
+      <p:nvGrpSpPr>
+        <p:cNvPr id="1" name="Shape 402">
+          <a:extLst>
+            <a:ext uri="{FF2B5EF4-FFF2-40B4-BE49-F238E27FC236}">
+              <a16:creationId xmlns:a16="http://schemas.microsoft.com/office/drawing/2014/main" id="{B508234F-A36D-5F9C-CBB2-E1A38CDC5D73}"/>
+            </a:ext>
+          </a:extLst>
+        </p:cNvPr>
+        <p:cNvGrpSpPr/>
+        <p:nvPr/>
+      </p:nvGrpSpPr>
+      <p:grpSpPr>
+        <a:xfrm>
+          <a:off x="0" y="0"/>
+          <a:ext cx="0" cy="0"/>
+          <a:chOff x="0" y="0"/>
+          <a:chExt cx="0" cy="0"/>
+        </a:xfrm>
+      </p:grpSpPr>
+      <p:sp>
+        <p:nvSpPr>
+          <p:cNvPr id="403" name="Google Shape;403;p42">
+            <a:extLst>
+              <a:ext uri="{FF2B5EF4-FFF2-40B4-BE49-F238E27FC236}">
+                <a16:creationId xmlns:a16="http://schemas.microsoft.com/office/drawing/2014/main" id="{A54C146B-FE0C-42B8-2FDA-261FC471E5B1}"/>
+              </a:ext>
+            </a:extLst>
+          </p:cNvPr>
+          <p:cNvSpPr txBox="1">
+            <a:spLocks noGrp="1"/>
+          </p:cNvSpPr>
+          <p:nvPr>
+            <p:ph type="title"/>
+          </p:nvPr>
+        </p:nvSpPr>
+        <p:spPr>
+          <a:xfrm>
+            <a:off x="720000" y="538492"/>
+            <a:ext cx="7704000" cy="572700"/>
+          </a:xfrm>
+          <a:prstGeom prst="rect">
+            <a:avLst/>
+          </a:prstGeom>
+        </p:spPr>
+        <p:txBody>
+          <a:bodyPr spcFirstLastPara="1" wrap="square" lIns="91425" tIns="91425" rIns="91425" bIns="91425" anchor="t" anchorCtr="0">
+            <a:noAutofit/>
+          </a:bodyPr>
+          <a:lstStyle/>
+          <a:p>
+            <a:pPr lvl="0"/>
+            <a:r>
+              <a:rPr lang="en-US" dirty="0"/>
+              <a:t>DAX</a:t>
+            </a:r>
+            <a:endParaRPr dirty="0"/>
+          </a:p>
+        </p:txBody>
+      </p:sp>
+      <p:sp>
+        <p:nvSpPr>
+          <p:cNvPr id="404" name="Google Shape;404;p42">
+            <a:extLst>
+              <a:ext uri="{FF2B5EF4-FFF2-40B4-BE49-F238E27FC236}">
+                <a16:creationId xmlns:a16="http://schemas.microsoft.com/office/drawing/2014/main" id="{D0E3EA75-89C2-7610-9122-5D51BC9CB7E3}"/>
+              </a:ext>
+            </a:extLst>
+          </p:cNvPr>
+          <p:cNvSpPr txBox="1">
+            <a:spLocks noGrp="1"/>
+          </p:cNvSpPr>
+          <p:nvPr>
+            <p:ph type="subTitle" idx="4"/>
+          </p:nvPr>
+        </p:nvSpPr>
+        <p:spPr>
+          <a:xfrm>
+            <a:off x="709758" y="1117699"/>
+            <a:ext cx="3931920" cy="457200"/>
+          </a:xfrm>
+          <a:prstGeom prst="rect">
+            <a:avLst/>
+          </a:prstGeom>
+        </p:spPr>
+        <p:txBody>
+          <a:bodyPr spcFirstLastPara="1" wrap="square" lIns="91425" tIns="91425" rIns="91425" bIns="91425" anchor="b" anchorCtr="0">
+            <a:noAutofit/>
+          </a:bodyPr>
+          <a:lstStyle/>
+          <a:p>
+            <a:pPr marL="0" lvl="0" indent="0"/>
+            <a:r>
+              <a:rPr lang="en-US" dirty="0">
+                <a:solidFill>
+                  <a:schemeClr val="tx1"/>
+                </a:solidFill>
+              </a:rPr>
+              <a:t>The following steps were taken:</a:t>
+            </a:r>
+            <a:endParaRPr dirty="0">
+              <a:latin typeface="Poppins"/>
+              <a:ea typeface="Poppins"/>
+              <a:cs typeface="Poppins"/>
+              <a:sym typeface="Poppins"/>
+            </a:endParaRPr>
+          </a:p>
+        </p:txBody>
+      </p:sp>
+      <p:sp>
+        <p:nvSpPr>
+          <p:cNvPr id="406" name="Google Shape;406;p42">
+            <a:extLst>
+              <a:ext uri="{FF2B5EF4-FFF2-40B4-BE49-F238E27FC236}">
+                <a16:creationId xmlns:a16="http://schemas.microsoft.com/office/drawing/2014/main" id="{4FA622F3-4E66-97FB-00E2-C3FFC8752BD6}"/>
+              </a:ext>
+            </a:extLst>
+          </p:cNvPr>
+          <p:cNvSpPr txBox="1">
+            <a:spLocks noGrp="1"/>
+          </p:cNvSpPr>
+          <p:nvPr>
+            <p:ph type="subTitle" idx="1"/>
+          </p:nvPr>
+        </p:nvSpPr>
+        <p:spPr>
+          <a:xfrm>
+            <a:off x="709750" y="1582154"/>
+            <a:ext cx="6583680" cy="2834640"/>
+          </a:xfrm>
+          <a:prstGeom prst="rect">
+            <a:avLst/>
+          </a:prstGeom>
+        </p:spPr>
+        <p:txBody>
+          <a:bodyPr spcFirstLastPara="1" wrap="square" lIns="91425" tIns="91425" rIns="91425" bIns="91425" anchor="t" anchorCtr="0">
+            <a:noAutofit/>
+          </a:bodyPr>
+          <a:lstStyle/>
+          <a:p>
+            <a:pPr lvl="0" algn="just">
+              <a:spcAft>
+                <a:spcPts val="600"/>
+              </a:spcAft>
+              <a:buFont typeface="Wingdings" pitchFamily="2" charset="2"/>
+              <a:buChar char="§"/>
+            </a:pPr>
+            <a:r>
+              <a:rPr lang="en-US" sz="1400" dirty="0"/>
+              <a:t>Total Trip = COUNT(</a:t>
+            </a:r>
+            <a:r>
+              <a:rPr lang="en-US" sz="1400" dirty="0" err="1"/>
+              <a:t>Cleaned_railway</a:t>
+            </a:r>
+            <a:r>
+              <a:rPr lang="en-US" sz="1400" dirty="0"/>
+              <a:t>[Transaction ID])</a:t>
+            </a:r>
+          </a:p>
+          <a:p>
+            <a:pPr algn="just">
+              <a:spcAft>
+                <a:spcPts val="600"/>
+              </a:spcAft>
+              <a:buFont typeface="Wingdings" pitchFamily="2" charset="2"/>
+              <a:buChar char="§"/>
+            </a:pPr>
+            <a:r>
+              <a:rPr lang="en-US" sz="1400" dirty="0" err="1"/>
+              <a:t>on_time_trip</a:t>
+            </a:r>
+            <a:r>
+              <a:rPr lang="en-US" sz="1400" dirty="0"/>
+              <a:t> = CALCULATE([Total Trip],</a:t>
+            </a:r>
+            <a:r>
+              <a:rPr lang="en-US" sz="1400" dirty="0" err="1"/>
+              <a:t>Cleaned_railway</a:t>
+            </a:r>
+            <a:r>
+              <a:rPr lang="en-US" sz="1400" dirty="0"/>
+              <a:t>[Journey Status]="ON Time")</a:t>
+            </a:r>
+          </a:p>
+          <a:p>
+            <a:pPr algn="just">
+              <a:spcAft>
+                <a:spcPts val="600"/>
+              </a:spcAft>
+              <a:buFont typeface="Wingdings" pitchFamily="2" charset="2"/>
+              <a:buChar char="§"/>
+            </a:pPr>
+            <a:r>
+              <a:rPr lang="en-US" sz="1400" dirty="0" err="1"/>
+              <a:t>Delayed_trip</a:t>
+            </a:r>
+            <a:r>
+              <a:rPr lang="en-US" sz="1400" dirty="0"/>
+              <a:t> = CALCULATE([Total Trip],</a:t>
+            </a:r>
+            <a:r>
+              <a:rPr lang="en-US" sz="1400" dirty="0" err="1"/>
+              <a:t>Cleaned_railway</a:t>
+            </a:r>
+            <a:r>
+              <a:rPr lang="en-US" sz="1400" dirty="0"/>
+              <a:t>[Journey Status]="Delayed")</a:t>
+            </a:r>
+          </a:p>
+          <a:p>
+            <a:pPr algn="just">
+              <a:spcAft>
+                <a:spcPts val="600"/>
+              </a:spcAft>
+              <a:buFont typeface="Wingdings" pitchFamily="2" charset="2"/>
+              <a:buChar char="§"/>
+            </a:pPr>
+            <a:r>
+              <a:rPr lang="en-US" sz="1400" dirty="0" err="1"/>
+              <a:t>Cancelled_trip</a:t>
+            </a:r>
+            <a:r>
+              <a:rPr lang="en-US" sz="1400" dirty="0"/>
+              <a:t> = CALCULATE([Total Trip],</a:t>
+            </a:r>
+            <a:r>
+              <a:rPr lang="en-US" sz="1400" dirty="0" err="1"/>
+              <a:t>Cleaned_railway</a:t>
+            </a:r>
+            <a:r>
+              <a:rPr lang="en-US" sz="1400" dirty="0"/>
+              <a:t>[Journey Status]="Cancelled")</a:t>
+            </a:r>
+          </a:p>
+          <a:p>
+            <a:pPr algn="just">
+              <a:spcAft>
+                <a:spcPts val="600"/>
+              </a:spcAft>
+              <a:buFont typeface="Wingdings" pitchFamily="2" charset="2"/>
+              <a:buChar char="§"/>
+            </a:pPr>
+            <a:r>
+              <a:rPr lang="en-US" sz="1400" dirty="0" err="1"/>
+              <a:t>Delay_percentage</a:t>
+            </a:r>
+            <a:r>
+              <a:rPr lang="en-US" sz="1400" dirty="0"/>
+              <a:t> = [</a:t>
+            </a:r>
+            <a:r>
+              <a:rPr lang="en-US" sz="1400" dirty="0" err="1"/>
+              <a:t>Delayed_trip</a:t>
+            </a:r>
+            <a:r>
+              <a:rPr lang="en-US" sz="1400" dirty="0"/>
+              <a:t>]/[Total Trip]*100</a:t>
+            </a:r>
+          </a:p>
+          <a:p>
+            <a:pPr algn="just">
+              <a:spcAft>
+                <a:spcPts val="600"/>
+              </a:spcAft>
+              <a:buFont typeface="Wingdings" pitchFamily="2" charset="2"/>
+              <a:buChar char="§"/>
+            </a:pPr>
+            <a:r>
+              <a:rPr lang="en-US" sz="1400" dirty="0" err="1"/>
+              <a:t>on_time_percentage</a:t>
+            </a:r>
+            <a:r>
+              <a:rPr lang="en-US" sz="1400" dirty="0"/>
+              <a:t> = [</a:t>
+            </a:r>
+            <a:r>
+              <a:rPr lang="en-US" sz="1400" dirty="0" err="1"/>
+              <a:t>on_time_trip</a:t>
+            </a:r>
+            <a:r>
+              <a:rPr lang="en-US" sz="1400" dirty="0"/>
+              <a:t>]/[Total Trip]*100</a:t>
+            </a:r>
+          </a:p>
+          <a:p>
+            <a:pPr algn="just">
+              <a:spcAft>
+                <a:spcPts val="600"/>
+              </a:spcAft>
+              <a:buFont typeface="Wingdings" pitchFamily="2" charset="2"/>
+              <a:buChar char="§"/>
+            </a:pPr>
+            <a:r>
+              <a:rPr lang="en-US" sz="1400" dirty="0" err="1"/>
+              <a:t>Cancelled_percentage</a:t>
+            </a:r>
+            <a:r>
+              <a:rPr lang="en-US" sz="1400" dirty="0"/>
+              <a:t> = [</a:t>
+            </a:r>
+            <a:r>
+              <a:rPr lang="en-US" sz="1400" dirty="0" err="1"/>
+              <a:t>Cancelled_trip</a:t>
+            </a:r>
+            <a:r>
+              <a:rPr lang="en-US" sz="1400" dirty="0"/>
+              <a:t>]/[Total Trip]*100</a:t>
+            </a:r>
+          </a:p>
+          <a:p>
+            <a:pPr marL="0" lvl="0" indent="0" algn="l" rtl="0">
+              <a:spcBef>
+                <a:spcPts val="0"/>
+              </a:spcBef>
+              <a:spcAft>
+                <a:spcPts val="0"/>
+              </a:spcAft>
+              <a:buNone/>
+            </a:pPr>
+            <a:r>
+              <a:rPr lang="en-US" sz="1400" dirty="0"/>
+              <a:t> </a:t>
+            </a:r>
+            <a:endParaRPr sz="1400" dirty="0"/>
+          </a:p>
+        </p:txBody>
+      </p:sp>
+    </p:spTree>
+    <p:extLst>
+      <p:ext uri="{BB962C8B-B14F-4D97-AF65-F5344CB8AC3E}">
+        <p14:creationId xmlns:p14="http://schemas.microsoft.com/office/powerpoint/2010/main" val="577025791"/>
+      </p:ext>
+    </p:extLst>
+  </p:cSld>
+  <p:clrMapOvr>
+    <a:masterClrMapping/>
+  </p:clrMapOvr>
+  <mc:AlternateContent xmlns:mc="http://schemas.openxmlformats.org/markup-compatibility/2006" xmlns:p14="http://schemas.microsoft.com/office/powerpoint/2010/main">
+    <mc:Choice Requires="p14">
+      <p:transition spd="slow" p14:dur="3400">
+        <p14:reveal/>
+      </p:transition>
+    </mc:Choice>
+    <mc:Fallback xmlns="">
+      <p:transition spd="slow">
+        <p:fade/>
+      </p:transition>
+    </mc:Fallback>
+  </mc:AlternateContent>
+  <p:timing>
+    <p:tnLst>
+      <p:par>
+        <p:cTn id="1" dur="indefinite" restart="never" nodeType="tmRoot">
+          <p:childTnLst>
+            <p:seq concurrent="1" nextAc="seek">
+              <p:cTn id="2" dur="indefinite" nodeType="mainSeq">
+                <p:childTnLst>
+                  <p:par>
+                    <p:cTn id="3" fill="hold">
+                      <p:stCondLst>
+                        <p:cond delay="indefinite"/>
+                        <p:cond evt="onBegin" delay="0">
+                          <p:tn val="2"/>
+                        </p:cond>
+                      </p:stCondLst>
+                      <p:childTnLst>
+                        <p:par>
+                          <p:cTn id="4" fill="hold">
+                            <p:stCondLst>
+                              <p:cond delay="0"/>
+                            </p:stCondLst>
+                            <p:childTnLst>
+                              <p:par>
+                                <p:cTn id="5" presetID="47" presetClass="entr" presetSubtype="0" fill="hold" grpId="0" nodeType="afterEffect">
+                                  <p:stCondLst>
+                                    <p:cond delay="0"/>
+                                  </p:stCondLst>
+                                  <p:childTnLst>
+                                    <p:set>
+                                      <p:cBhvr>
+                                        <p:cTn id="6" dur="1" fill="hold">
+                                          <p:stCondLst>
+                                            <p:cond delay="0"/>
+                                          </p:stCondLst>
+                                        </p:cTn>
+                                        <p:tgtEl>
+                                          <p:spTgt spid="403"/>
+                                        </p:tgtEl>
+                                        <p:attrNameLst>
+                                          <p:attrName>style.visibility</p:attrName>
+                                        </p:attrNameLst>
+                                      </p:cBhvr>
+                                      <p:to>
+                                        <p:strVal val="visible"/>
+                                      </p:to>
+                                    </p:set>
+                                    <p:animEffect transition="in" filter="fade">
+                                      <p:cBhvr>
+                                        <p:cTn id="7" dur="1000"/>
+                                        <p:tgtEl>
+                                          <p:spTgt spid="403"/>
+                                        </p:tgtEl>
+                                      </p:cBhvr>
+                                    </p:animEffect>
+                                    <p:anim calcmode="lin" valueType="num">
+                                      <p:cBhvr>
+                                        <p:cTn id="8" dur="1000" fill="hold"/>
+                                        <p:tgtEl>
+                                          <p:spTgt spid="403"/>
+                                        </p:tgtEl>
+                                        <p:attrNameLst>
+                                          <p:attrName>ppt_x</p:attrName>
+                                        </p:attrNameLst>
+                                      </p:cBhvr>
+                                      <p:tavLst>
+                                        <p:tav tm="0">
+                                          <p:val>
+                                            <p:strVal val="#ppt_x"/>
+                                          </p:val>
+                                        </p:tav>
+                                        <p:tav tm="100000">
+                                          <p:val>
+                                            <p:strVal val="#ppt_x"/>
+                                          </p:val>
+                                        </p:tav>
+                                      </p:tavLst>
+                                    </p:anim>
+                                    <p:anim calcmode="lin" valueType="num">
+                                      <p:cBhvr>
+                                        <p:cTn id="9" dur="1000" fill="hold"/>
+                                        <p:tgtEl>
+                                          <p:spTgt spid="403"/>
+                                        </p:tgtEl>
+                                        <p:attrNameLst>
+                                          <p:attrName>ppt_y</p:attrName>
+                                        </p:attrNameLst>
+                                      </p:cBhvr>
+                                      <p:tavLst>
+                                        <p:tav tm="0">
+                                          <p:val>
+                                            <p:strVal val="#ppt_y-.1"/>
+                                          </p:val>
+                                        </p:tav>
+                                        <p:tav tm="100000">
+                                          <p:val>
+                                            <p:strVal val="#ppt_y"/>
+                                          </p:val>
+                                        </p:tav>
+                                      </p:tavLst>
+                                    </p:anim>
+                                  </p:childTnLst>
+                                </p:cTn>
+                              </p:par>
+                            </p:childTnLst>
+                          </p:cTn>
+                        </p:par>
+                      </p:childTnLst>
+                    </p:cTn>
+                  </p:par>
                   <p:par>
                     <p:cTn id="10" fill="hold">
                       <p:stCondLst>
@@ -12451,7 +13456,7 @@
                             </p:stCondLst>
                             <p:childTnLst>
                               <p:par>
-                                <p:cTn id="12" presetID="53" presetClass="entr" presetSubtype="16" fill="hold" nodeType="clickEffect">
+                                <p:cTn id="12" presetID="47" presetClass="entr" presetSubtype="0" fill="hold" grpId="0" nodeType="clickEffect">
                                   <p:stCondLst>
                                     <p:cond delay="0"/>
                                   </p:stCondLst>
@@ -12464,7 +13469,7 @@
                                           </p:stCondLst>
                                         </p:cTn>
                                         <p:tgtEl>
-                                          <p:spTgt spid="2"/>
+                                          <p:spTgt spid="404"/>
                                         </p:tgtEl>
                                         <p:attrNameLst>
                                           <p:attrName>style.visibility</p:attrName>
@@ -12474,57 +13479,545 @@
                                         <p:strVal val="visible"/>
                                       </p:to>
                                     </p:set>
+                                    <p:animEffect transition="in" filter="fade">
+                                      <p:cBhvr>
+                                        <p:cTn id="14" dur="1000"/>
+                                        <p:tgtEl>
+                                          <p:spTgt spid="404"/>
+                                        </p:tgtEl>
+                                      </p:cBhvr>
+                                    </p:animEffect>
                                     <p:anim calcmode="lin" valueType="num">
                                       <p:cBhvr>
-                                        <p:cTn id="14" dur="1500" fill="hold"/>
-                                        <p:tgtEl>
-                                          <p:spTgt spid="2"/>
+                                        <p:cTn id="15" dur="1000" fill="hold"/>
+                                        <p:tgtEl>
+                                          <p:spTgt spid="404"/>
                                         </p:tgtEl>
                                         <p:attrNameLst>
-                                          <p:attrName>ppt_w</p:attrName>
+                                          <p:attrName>ppt_x</p:attrName>
                                         </p:attrNameLst>
                                       </p:cBhvr>
                                       <p:tavLst>
                                         <p:tav tm="0">
                                           <p:val>
-                                            <p:fltVal val="0"/>
+                                            <p:strVal val="#ppt_x"/>
                                           </p:val>
                                         </p:tav>
                                         <p:tav tm="100000">
                                           <p:val>
-                                            <p:strVal val="#ppt_w"/>
+                                            <p:strVal val="#ppt_x"/>
                                           </p:val>
                                         </p:tav>
                                       </p:tavLst>
                                     </p:anim>
                                     <p:anim calcmode="lin" valueType="num">
                                       <p:cBhvr>
-                                        <p:cTn id="15" dur="1500" fill="hold"/>
-                                        <p:tgtEl>
-                                          <p:spTgt spid="2"/>
+                                        <p:cTn id="16" dur="1000" fill="hold"/>
+                                        <p:tgtEl>
+                                          <p:spTgt spid="404"/>
                                         </p:tgtEl>
                                         <p:attrNameLst>
-                                          <p:attrName>ppt_h</p:attrName>
+                                          <p:attrName>ppt_y</p:attrName>
                                         </p:attrNameLst>
                                       </p:cBhvr>
                                       <p:tavLst>
                                         <p:tav tm="0">
                                           <p:val>
-                                            <p:fltVal val="0"/>
+                                            <p:strVal val="#ppt_y-.1"/>
                                           </p:val>
                                         </p:tav>
                                         <p:tav tm="100000">
                                           <p:val>
-                                            <p:strVal val="#ppt_h"/>
+                                            <p:strVal val="#ppt_y"/>
                                           </p:val>
                                         </p:tav>
                                       </p:tavLst>
                                     </p:anim>
-                                    <p:animEffect transition="in" filter="fade">
+                                  </p:childTnLst>
+                                </p:cTn>
+                              </p:par>
+                            </p:childTnLst>
+                          </p:cTn>
+                        </p:par>
+                      </p:childTnLst>
+                    </p:cTn>
+                  </p:par>
+                  <p:par>
+                    <p:cTn id="17" fill="hold">
+                      <p:stCondLst>
+                        <p:cond delay="indefinite"/>
+                      </p:stCondLst>
+                      <p:childTnLst>
+                        <p:par>
+                          <p:cTn id="18" fill="hold">
+                            <p:stCondLst>
+                              <p:cond delay="0"/>
+                            </p:stCondLst>
+                            <p:childTnLst>
+                              <p:par>
+                                <p:cTn id="19" presetID="22" presetClass="entr" presetSubtype="1" fill="hold" grpId="0" nodeType="clickEffect">
+                                  <p:stCondLst>
+                                    <p:cond delay="0"/>
+                                  </p:stCondLst>
+                                  <p:childTnLst>
+                                    <p:set>
                                       <p:cBhvr>
-                                        <p:cTn id="16" dur="1500"/>
-                                        <p:tgtEl>
-                                          <p:spTgt spid="2"/>
+                                        <p:cTn id="20" dur="1" fill="hold">
+                                          <p:stCondLst>
+                                            <p:cond delay="0"/>
+                                          </p:stCondLst>
+                                        </p:cTn>
+                                        <p:tgtEl>
+                                          <p:spTgt spid="406">
+                                            <p:txEl>
+                                              <p:pRg st="0" end="0"/>
+                                            </p:txEl>
+                                          </p:spTgt>
+                                        </p:tgtEl>
+                                        <p:attrNameLst>
+                                          <p:attrName>style.visibility</p:attrName>
+                                        </p:attrNameLst>
+                                      </p:cBhvr>
+                                      <p:to>
+                                        <p:strVal val="visible"/>
+                                      </p:to>
+                                    </p:set>
+                                    <p:animEffect transition="in" filter="wipe(up)">
+                                      <p:cBhvr>
+                                        <p:cTn id="21" dur="1000"/>
+                                        <p:tgtEl>
+                                          <p:spTgt spid="406">
+                                            <p:txEl>
+                                              <p:pRg st="0" end="0"/>
+                                            </p:txEl>
+                                          </p:spTgt>
+                                        </p:tgtEl>
+                                      </p:cBhvr>
+                                    </p:animEffect>
+                                  </p:childTnLst>
+                                </p:cTn>
+                              </p:par>
+                            </p:childTnLst>
+                          </p:cTn>
+                        </p:par>
+                      </p:childTnLst>
+                    </p:cTn>
+                  </p:par>
+                  <p:par>
+                    <p:cTn id="22" fill="hold">
+                      <p:stCondLst>
+                        <p:cond delay="indefinite"/>
+                      </p:stCondLst>
+                      <p:childTnLst>
+                        <p:par>
+                          <p:cTn id="23" fill="hold">
+                            <p:stCondLst>
+                              <p:cond delay="0"/>
+                            </p:stCondLst>
+                            <p:childTnLst>
+                              <p:par>
+                                <p:cTn id="24" presetID="22" presetClass="entr" presetSubtype="1" fill="hold" grpId="0" nodeType="clickEffect">
+                                  <p:stCondLst>
+                                    <p:cond delay="0"/>
+                                  </p:stCondLst>
+                                  <p:childTnLst>
+                                    <p:set>
+                                      <p:cBhvr>
+                                        <p:cTn id="25" dur="1" fill="hold">
+                                          <p:stCondLst>
+                                            <p:cond delay="0"/>
+                                          </p:stCondLst>
+                                        </p:cTn>
+                                        <p:tgtEl>
+                                          <p:spTgt spid="406">
+                                            <p:txEl>
+                                              <p:pRg st="1" end="1"/>
+                                            </p:txEl>
+                                          </p:spTgt>
+                                        </p:tgtEl>
+                                        <p:attrNameLst>
+                                          <p:attrName>style.visibility</p:attrName>
+                                        </p:attrNameLst>
+                                      </p:cBhvr>
+                                      <p:to>
+                                        <p:strVal val="visible"/>
+                                      </p:to>
+                                    </p:set>
+                                    <p:animEffect transition="in" filter="wipe(up)">
+                                      <p:cBhvr>
+                                        <p:cTn id="26" dur="1000"/>
+                                        <p:tgtEl>
+                                          <p:spTgt spid="406">
+                                            <p:txEl>
+                                              <p:pRg st="1" end="1"/>
+                                            </p:txEl>
+                                          </p:spTgt>
+                                        </p:tgtEl>
+                                      </p:cBhvr>
+                                    </p:animEffect>
+                                  </p:childTnLst>
+                                </p:cTn>
+                              </p:par>
+                            </p:childTnLst>
+                          </p:cTn>
+                        </p:par>
+                      </p:childTnLst>
+                    </p:cTn>
+                  </p:par>
+                  <p:par>
+                    <p:cTn id="27" fill="hold">
+                      <p:stCondLst>
+                        <p:cond delay="indefinite"/>
+                      </p:stCondLst>
+                      <p:childTnLst>
+                        <p:par>
+                          <p:cTn id="28" fill="hold">
+                            <p:stCondLst>
+                              <p:cond delay="0"/>
+                            </p:stCondLst>
+                            <p:childTnLst>
+                              <p:par>
+                                <p:cTn id="29" presetID="22" presetClass="entr" presetSubtype="1" fill="hold" grpId="0" nodeType="clickEffect">
+                                  <p:stCondLst>
+                                    <p:cond delay="0"/>
+                                  </p:stCondLst>
+                                  <p:childTnLst>
+                                    <p:set>
+                                      <p:cBhvr>
+                                        <p:cTn id="30" dur="1" fill="hold">
+                                          <p:stCondLst>
+                                            <p:cond delay="0"/>
+                                          </p:stCondLst>
+                                        </p:cTn>
+                                        <p:tgtEl>
+                                          <p:spTgt spid="406">
+                                            <p:txEl>
+                                              <p:pRg st="2" end="2"/>
+                                            </p:txEl>
+                                          </p:spTgt>
+                                        </p:tgtEl>
+                                        <p:attrNameLst>
+                                          <p:attrName>style.visibility</p:attrName>
+                                        </p:attrNameLst>
+                                      </p:cBhvr>
+                                      <p:to>
+                                        <p:strVal val="visible"/>
+                                      </p:to>
+                                    </p:set>
+                                    <p:animEffect transition="in" filter="wipe(up)">
+                                      <p:cBhvr>
+                                        <p:cTn id="31" dur="1000"/>
+                                        <p:tgtEl>
+                                          <p:spTgt spid="406">
+                                            <p:txEl>
+                                              <p:pRg st="2" end="2"/>
+                                            </p:txEl>
+                                          </p:spTgt>
+                                        </p:tgtEl>
+                                      </p:cBhvr>
+                                    </p:animEffect>
+                                  </p:childTnLst>
+                                </p:cTn>
+                              </p:par>
+                            </p:childTnLst>
+                          </p:cTn>
+                        </p:par>
+                      </p:childTnLst>
+                    </p:cTn>
+                  </p:par>
+                  <p:par>
+                    <p:cTn id="32" fill="hold">
+                      <p:stCondLst>
+                        <p:cond delay="indefinite"/>
+                      </p:stCondLst>
+                      <p:childTnLst>
+                        <p:par>
+                          <p:cTn id="33" fill="hold">
+                            <p:stCondLst>
+                              <p:cond delay="0"/>
+                            </p:stCondLst>
+                            <p:childTnLst>
+                              <p:par>
+                                <p:cTn id="34" presetID="22" presetClass="entr" presetSubtype="1" fill="hold" grpId="0" nodeType="clickEffect">
+                                  <p:stCondLst>
+                                    <p:cond delay="0"/>
+                                  </p:stCondLst>
+                                  <p:childTnLst>
+                                    <p:set>
+                                      <p:cBhvr>
+                                        <p:cTn id="35" dur="1" fill="hold">
+                                          <p:stCondLst>
+                                            <p:cond delay="0"/>
+                                          </p:stCondLst>
+                                        </p:cTn>
+                                        <p:tgtEl>
+                                          <p:spTgt spid="406">
+                                            <p:txEl>
+                                              <p:pRg st="3" end="3"/>
+                                            </p:txEl>
+                                          </p:spTgt>
+                                        </p:tgtEl>
+                                        <p:attrNameLst>
+                                          <p:attrName>style.visibility</p:attrName>
+                                        </p:attrNameLst>
+                                      </p:cBhvr>
+                                      <p:to>
+                                        <p:strVal val="visible"/>
+                                      </p:to>
+                                    </p:set>
+                                    <p:animEffect transition="in" filter="wipe(up)">
+                                      <p:cBhvr>
+                                        <p:cTn id="36" dur="1000"/>
+                                        <p:tgtEl>
+                                          <p:spTgt spid="406">
+                                            <p:txEl>
+                                              <p:pRg st="3" end="3"/>
+                                            </p:txEl>
+                                          </p:spTgt>
+                                        </p:tgtEl>
+                                      </p:cBhvr>
+                                    </p:animEffect>
+                                  </p:childTnLst>
+                                </p:cTn>
+                              </p:par>
+                            </p:childTnLst>
+                          </p:cTn>
+                        </p:par>
+                      </p:childTnLst>
+                    </p:cTn>
+                  </p:par>
+                  <p:par>
+                    <p:cTn id="37" fill="hold">
+                      <p:stCondLst>
+                        <p:cond delay="indefinite"/>
+                      </p:stCondLst>
+                      <p:childTnLst>
+                        <p:par>
+                          <p:cTn id="38" fill="hold">
+                            <p:stCondLst>
+                              <p:cond delay="0"/>
+                            </p:stCondLst>
+                            <p:childTnLst>
+                              <p:par>
+                                <p:cTn id="39" presetID="22" presetClass="entr" presetSubtype="1" fill="hold" grpId="0" nodeType="clickEffect">
+                                  <p:stCondLst>
+                                    <p:cond delay="0"/>
+                                  </p:stCondLst>
+                                  <p:childTnLst>
+                                    <p:set>
+                                      <p:cBhvr>
+                                        <p:cTn id="40" dur="1" fill="hold">
+                                          <p:stCondLst>
+                                            <p:cond delay="0"/>
+                                          </p:stCondLst>
+                                        </p:cTn>
+                                        <p:tgtEl>
+                                          <p:spTgt spid="406">
+                                            <p:txEl>
+                                              <p:pRg st="4" end="4"/>
+                                            </p:txEl>
+                                          </p:spTgt>
+                                        </p:tgtEl>
+                                        <p:attrNameLst>
+                                          <p:attrName>style.visibility</p:attrName>
+                                        </p:attrNameLst>
+                                      </p:cBhvr>
+                                      <p:to>
+                                        <p:strVal val="visible"/>
+                                      </p:to>
+                                    </p:set>
+                                    <p:animEffect transition="in" filter="wipe(up)">
+                                      <p:cBhvr>
+                                        <p:cTn id="41" dur="1000"/>
+                                        <p:tgtEl>
+                                          <p:spTgt spid="406">
+                                            <p:txEl>
+                                              <p:pRg st="4" end="4"/>
+                                            </p:txEl>
+                                          </p:spTgt>
+                                        </p:tgtEl>
+                                      </p:cBhvr>
+                                    </p:animEffect>
+                                  </p:childTnLst>
+                                </p:cTn>
+                              </p:par>
+                            </p:childTnLst>
+                          </p:cTn>
+                        </p:par>
+                      </p:childTnLst>
+                    </p:cTn>
+                  </p:par>
+                  <p:par>
+                    <p:cTn id="42" fill="hold">
+                      <p:stCondLst>
+                        <p:cond delay="indefinite"/>
+                      </p:stCondLst>
+                      <p:childTnLst>
+                        <p:par>
+                          <p:cTn id="43" fill="hold">
+                            <p:stCondLst>
+                              <p:cond delay="0"/>
+                            </p:stCondLst>
+                            <p:childTnLst>
+                              <p:par>
+                                <p:cTn id="44" presetID="22" presetClass="entr" presetSubtype="1" fill="hold" grpId="0" nodeType="clickEffect">
+                                  <p:stCondLst>
+                                    <p:cond delay="0"/>
+                                  </p:stCondLst>
+                                  <p:childTnLst>
+                                    <p:set>
+                                      <p:cBhvr>
+                                        <p:cTn id="45" dur="1" fill="hold">
+                                          <p:stCondLst>
+                                            <p:cond delay="0"/>
+                                          </p:stCondLst>
+                                        </p:cTn>
+                                        <p:tgtEl>
+                                          <p:spTgt spid="406">
+                                            <p:txEl>
+                                              <p:pRg st="5" end="5"/>
+                                            </p:txEl>
+                                          </p:spTgt>
+                                        </p:tgtEl>
+                                        <p:attrNameLst>
+                                          <p:attrName>style.visibility</p:attrName>
+                                        </p:attrNameLst>
+                                      </p:cBhvr>
+                                      <p:to>
+                                        <p:strVal val="visible"/>
+                                      </p:to>
+                                    </p:set>
+                                    <p:animEffect transition="in" filter="wipe(up)">
+                                      <p:cBhvr>
+                                        <p:cTn id="46" dur="1000"/>
+                                        <p:tgtEl>
+                                          <p:spTgt spid="406">
+                                            <p:txEl>
+                                              <p:pRg st="5" end="5"/>
+                                            </p:txEl>
+                                          </p:spTgt>
+                                        </p:tgtEl>
+                                      </p:cBhvr>
+                                    </p:animEffect>
+                                  </p:childTnLst>
+                                </p:cTn>
+                              </p:par>
+                            </p:childTnLst>
+                          </p:cTn>
+                        </p:par>
+                      </p:childTnLst>
+                    </p:cTn>
+                  </p:par>
+                  <p:par>
+                    <p:cTn id="47" fill="hold">
+                      <p:stCondLst>
+                        <p:cond delay="indefinite"/>
+                      </p:stCondLst>
+                      <p:childTnLst>
+                        <p:par>
+                          <p:cTn id="48" fill="hold">
+                            <p:stCondLst>
+                              <p:cond delay="0"/>
+                            </p:stCondLst>
+                            <p:childTnLst>
+                              <p:par>
+                                <p:cTn id="49" presetID="22" presetClass="entr" presetSubtype="1" fill="hold" grpId="0" nodeType="clickEffect">
+                                  <p:stCondLst>
+                                    <p:cond delay="0"/>
+                                  </p:stCondLst>
+                                  <p:childTnLst>
+                                    <p:set>
+                                      <p:cBhvr>
+                                        <p:cTn id="50" dur="1" fill="hold">
+                                          <p:stCondLst>
+                                            <p:cond delay="0"/>
+                                          </p:stCondLst>
+                                        </p:cTn>
+                                        <p:tgtEl>
+                                          <p:spTgt spid="406">
+                                            <p:txEl>
+                                              <p:pRg st="6" end="6"/>
+                                            </p:txEl>
+                                          </p:spTgt>
+                                        </p:tgtEl>
+                                        <p:attrNameLst>
+                                          <p:attrName>style.visibility</p:attrName>
+                                        </p:attrNameLst>
+                                      </p:cBhvr>
+                                      <p:to>
+                                        <p:strVal val="visible"/>
+                                      </p:to>
+                                    </p:set>
+                                    <p:animEffect transition="in" filter="wipe(up)">
+                                      <p:cBhvr>
+                                        <p:cTn id="51" dur="1000"/>
+                                        <p:tgtEl>
+                                          <p:spTgt spid="406">
+                                            <p:txEl>
+                                              <p:pRg st="6" end="6"/>
+                                            </p:txEl>
+                                          </p:spTgt>
+                                        </p:tgtEl>
+                                      </p:cBhvr>
+                                    </p:animEffect>
+                                  </p:childTnLst>
+                                </p:cTn>
+                              </p:par>
+                            </p:childTnLst>
+                          </p:cTn>
+                        </p:par>
+                      </p:childTnLst>
+                    </p:cTn>
+                  </p:par>
+                  <p:par>
+                    <p:cTn id="52" fill="hold">
+                      <p:stCondLst>
+                        <p:cond delay="indefinite"/>
+                      </p:stCondLst>
+                      <p:childTnLst>
+                        <p:par>
+                          <p:cTn id="53" fill="hold">
+                            <p:stCondLst>
+                              <p:cond delay="0"/>
+                            </p:stCondLst>
+                            <p:childTnLst>
+                              <p:par>
+                                <p:cTn id="54" presetID="22" presetClass="entr" presetSubtype="1" fill="hold" grpId="0" nodeType="clickEffect">
+                                  <p:stCondLst>
+                                    <p:cond delay="0"/>
+                                  </p:stCondLst>
+                                  <p:childTnLst>
+                                    <p:set>
+                                      <p:cBhvr>
+                                        <p:cTn id="55" dur="1" fill="hold">
+                                          <p:stCondLst>
+                                            <p:cond delay="0"/>
+                                          </p:stCondLst>
+                                        </p:cTn>
+                                        <p:tgtEl>
+                                          <p:spTgt spid="406">
+                                            <p:txEl>
+                                              <p:pRg st="7" end="7"/>
+                                            </p:txEl>
+                                          </p:spTgt>
+                                        </p:tgtEl>
+                                        <p:attrNameLst>
+                                          <p:attrName>style.visibility</p:attrName>
+                                        </p:attrNameLst>
+                                      </p:cBhvr>
+                                      <p:to>
+                                        <p:strVal val="visible"/>
+                                      </p:to>
+                                    </p:set>
+                                    <p:animEffect transition="in" filter="wipe(up)">
+                                      <p:cBhvr>
+                                        <p:cTn id="56" dur="1000"/>
+                                        <p:tgtEl>
+                                          <p:spTgt spid="406">
+                                            <p:txEl>
+                                              <p:pRg st="7" end="7"/>
+                                            </p:txEl>
+                                          </p:spTgt>
                                         </p:tgtEl>
                                       </p:cBhvr>
                                     </p:animEffect>
@@ -12559,13 +14052,1805 @@
       </p:par>
     </p:tnLst>
     <p:bldLst>
-      <p:bldP spid="490" grpId="0"/>
+      <p:bldP spid="403" grpId="0"/>
+      <p:bldP spid="404" grpId="0"/>
+      <p:bldP spid="406" grpId="0" build="p"/>
     </p:bldLst>
   </p:timing>
 </p:sld>
 </file>
 
-<file path=ppt/slides/slide11.xml><?xml version="1.0" encoding="utf-8"?>
+<file path=ppt/slides/slide12.xml><?xml version="1.0" encoding="utf-8"?>
+<p:sld xmlns:a="http://schemas.openxmlformats.org/drawingml/2006/main" xmlns:r="http://schemas.openxmlformats.org/officeDocument/2006/relationships" xmlns:p="http://schemas.openxmlformats.org/presentationml/2006/main">
+  <p:cSld>
+    <p:spTree>
+      <p:nvGrpSpPr>
+        <p:cNvPr id="1" name="Shape 402">
+          <a:extLst>
+            <a:ext uri="{FF2B5EF4-FFF2-40B4-BE49-F238E27FC236}">
+              <a16:creationId xmlns:a16="http://schemas.microsoft.com/office/drawing/2014/main" id="{61C3FDC1-AFC6-756A-68FF-93B2E60EE9A3}"/>
+            </a:ext>
+          </a:extLst>
+        </p:cNvPr>
+        <p:cNvGrpSpPr/>
+        <p:nvPr/>
+      </p:nvGrpSpPr>
+      <p:grpSpPr>
+        <a:xfrm>
+          <a:off x="0" y="0"/>
+          <a:ext cx="0" cy="0"/>
+          <a:chOff x="0" y="0"/>
+          <a:chExt cx="0" cy="0"/>
+        </a:xfrm>
+      </p:grpSpPr>
+      <p:sp>
+        <p:nvSpPr>
+          <p:cNvPr id="403" name="Google Shape;403;p42">
+            <a:extLst>
+              <a:ext uri="{FF2B5EF4-FFF2-40B4-BE49-F238E27FC236}">
+                <a16:creationId xmlns:a16="http://schemas.microsoft.com/office/drawing/2014/main" id="{4488D2AE-3F6A-DFC3-A7E1-40E2D6C93C6D}"/>
+              </a:ext>
+            </a:extLst>
+          </p:cNvPr>
+          <p:cNvSpPr txBox="1">
+            <a:spLocks noGrp="1"/>
+          </p:cNvSpPr>
+          <p:nvPr>
+            <p:ph type="title"/>
+          </p:nvPr>
+        </p:nvSpPr>
+        <p:spPr>
+          <a:xfrm>
+            <a:off x="720000" y="538492"/>
+            <a:ext cx="7704000" cy="572700"/>
+          </a:xfrm>
+          <a:prstGeom prst="rect">
+            <a:avLst/>
+          </a:prstGeom>
+        </p:spPr>
+        <p:txBody>
+          <a:bodyPr spcFirstLastPara="1" wrap="square" lIns="91425" tIns="91425" rIns="91425" bIns="91425" anchor="t" anchorCtr="0">
+            <a:noAutofit/>
+          </a:bodyPr>
+          <a:lstStyle/>
+          <a:p>
+            <a:pPr lvl="0"/>
+            <a:r>
+              <a:rPr lang="en-US" dirty="0"/>
+              <a:t>DAX</a:t>
+            </a:r>
+            <a:endParaRPr dirty="0"/>
+          </a:p>
+        </p:txBody>
+      </p:sp>
+      <p:sp>
+        <p:nvSpPr>
+          <p:cNvPr id="404" name="Google Shape;404;p42">
+            <a:extLst>
+              <a:ext uri="{FF2B5EF4-FFF2-40B4-BE49-F238E27FC236}">
+                <a16:creationId xmlns:a16="http://schemas.microsoft.com/office/drawing/2014/main" id="{6EF7D6CB-FDCC-6F2D-6FB8-BAEC0E021C0A}"/>
+              </a:ext>
+            </a:extLst>
+          </p:cNvPr>
+          <p:cNvSpPr txBox="1">
+            <a:spLocks noGrp="1"/>
+          </p:cNvSpPr>
+          <p:nvPr>
+            <p:ph type="subTitle" idx="4"/>
+          </p:nvPr>
+        </p:nvSpPr>
+        <p:spPr>
+          <a:xfrm>
+            <a:off x="709758" y="1117699"/>
+            <a:ext cx="3931920" cy="457200"/>
+          </a:xfrm>
+          <a:prstGeom prst="rect">
+            <a:avLst/>
+          </a:prstGeom>
+        </p:spPr>
+        <p:txBody>
+          <a:bodyPr spcFirstLastPara="1" wrap="square" lIns="91425" tIns="91425" rIns="91425" bIns="91425" anchor="b" anchorCtr="0">
+            <a:noAutofit/>
+          </a:bodyPr>
+          <a:lstStyle/>
+          <a:p>
+            <a:pPr marL="0" lvl="0" indent="0"/>
+            <a:r>
+              <a:rPr lang="en-US" dirty="0">
+                <a:solidFill>
+                  <a:schemeClr val="tx1"/>
+                </a:solidFill>
+              </a:rPr>
+              <a:t>The following steps were taken:</a:t>
+            </a:r>
+            <a:endParaRPr dirty="0">
+              <a:latin typeface="Poppins"/>
+              <a:ea typeface="Poppins"/>
+              <a:cs typeface="Poppins"/>
+              <a:sym typeface="Poppins"/>
+            </a:endParaRPr>
+          </a:p>
+        </p:txBody>
+      </p:sp>
+      <p:sp>
+        <p:nvSpPr>
+          <p:cNvPr id="406" name="Google Shape;406;p42">
+            <a:extLst>
+              <a:ext uri="{FF2B5EF4-FFF2-40B4-BE49-F238E27FC236}">
+                <a16:creationId xmlns:a16="http://schemas.microsoft.com/office/drawing/2014/main" id="{59E91F19-EC81-C998-7C41-79D672104472}"/>
+              </a:ext>
+            </a:extLst>
+          </p:cNvPr>
+          <p:cNvSpPr txBox="1">
+            <a:spLocks noGrp="1"/>
+          </p:cNvSpPr>
+          <p:nvPr>
+            <p:ph type="subTitle" idx="1"/>
+          </p:nvPr>
+        </p:nvSpPr>
+        <p:spPr>
+          <a:xfrm>
+            <a:off x="709750" y="1582154"/>
+            <a:ext cx="7040880" cy="2834640"/>
+          </a:xfrm>
+          <a:prstGeom prst="rect">
+            <a:avLst/>
+          </a:prstGeom>
+        </p:spPr>
+        <p:txBody>
+          <a:bodyPr spcFirstLastPara="1" wrap="square" lIns="91425" tIns="91425" rIns="91425" bIns="91425" anchor="t" anchorCtr="0">
+            <a:noAutofit/>
+          </a:bodyPr>
+          <a:lstStyle/>
+          <a:p>
+            <a:pPr algn="just">
+              <a:spcAft>
+                <a:spcPts val="600"/>
+              </a:spcAft>
+              <a:buFont typeface="Wingdings" pitchFamily="2" charset="2"/>
+              <a:buChar char="§"/>
+            </a:pPr>
+            <a:r>
+              <a:rPr lang="en-US" sz="1400" dirty="0" err="1"/>
+              <a:t>avg_delay_duration</a:t>
+            </a:r>
+            <a:r>
+              <a:rPr lang="en-US" sz="1400" dirty="0"/>
+              <a:t> = AVERAGE(</a:t>
+            </a:r>
+            <a:r>
+              <a:rPr lang="en-US" sz="1400" dirty="0" err="1"/>
+              <a:t>Cleaned_railway</a:t>
+            </a:r>
+            <a:r>
+              <a:rPr lang="en-US" sz="1400" dirty="0"/>
+              <a:t>[Delayed in Minutes])</a:t>
+            </a:r>
+          </a:p>
+          <a:p>
+            <a:pPr algn="just">
+              <a:spcAft>
+                <a:spcPts val="600"/>
+              </a:spcAft>
+              <a:buFont typeface="Wingdings" pitchFamily="2" charset="2"/>
+              <a:buChar char="§"/>
+            </a:pPr>
+            <a:r>
+              <a:rPr lang="en-US" sz="1400" dirty="0" err="1"/>
+              <a:t>max_delay_duration</a:t>
+            </a:r>
+            <a:r>
+              <a:rPr lang="en-US" sz="1400" dirty="0"/>
+              <a:t> = MAX(</a:t>
+            </a:r>
+            <a:r>
+              <a:rPr lang="en-US" sz="1400" dirty="0" err="1"/>
+              <a:t>Cleaned_railway</a:t>
+            </a:r>
+            <a:r>
+              <a:rPr lang="en-US" sz="1400" dirty="0"/>
+              <a:t>[Delayed in Minutes])</a:t>
+            </a:r>
+          </a:p>
+          <a:p>
+            <a:pPr algn="just">
+              <a:spcAft>
+                <a:spcPts val="600"/>
+              </a:spcAft>
+              <a:buFont typeface="Wingdings" pitchFamily="2" charset="2"/>
+              <a:buChar char="§"/>
+            </a:pPr>
+            <a:r>
+              <a:rPr lang="en-US" sz="1400" dirty="0" err="1"/>
+              <a:t>min_delay_duration</a:t>
+            </a:r>
+            <a:r>
+              <a:rPr lang="en-US" sz="1400" dirty="0"/>
+              <a:t> = MIN(</a:t>
+            </a:r>
+            <a:r>
+              <a:rPr lang="en-US" sz="1400" dirty="0" err="1"/>
+              <a:t>Cleaned_railway</a:t>
+            </a:r>
+            <a:r>
+              <a:rPr lang="en-US" sz="1400" dirty="0"/>
+              <a:t>[Delayed in Minutes])</a:t>
+            </a:r>
+          </a:p>
+          <a:p>
+            <a:pPr algn="just">
+              <a:spcAft>
+                <a:spcPts val="600"/>
+              </a:spcAft>
+              <a:buFont typeface="Wingdings" pitchFamily="2" charset="2"/>
+              <a:buChar char="§"/>
+            </a:pPr>
+            <a:r>
+              <a:rPr lang="en-US" sz="1400" dirty="0" err="1"/>
+              <a:t>total_revenue</a:t>
+            </a:r>
+            <a:r>
+              <a:rPr lang="en-US" sz="1400" dirty="0"/>
+              <a:t> = SUM(</a:t>
+            </a:r>
+            <a:r>
+              <a:rPr lang="en-US" sz="1400" dirty="0" err="1"/>
+              <a:t>Cleaned_railway</a:t>
+            </a:r>
+            <a:r>
+              <a:rPr lang="en-US" sz="1400" dirty="0"/>
+              <a:t>[Price])</a:t>
+            </a:r>
+          </a:p>
+          <a:p>
+            <a:pPr algn="just">
+              <a:spcAft>
+                <a:spcPts val="600"/>
+              </a:spcAft>
+              <a:buFont typeface="Wingdings" pitchFamily="2" charset="2"/>
+              <a:buChar char="§"/>
+            </a:pPr>
+            <a:r>
+              <a:rPr lang="en-US" sz="1400" dirty="0" err="1"/>
+              <a:t>avg_price</a:t>
+            </a:r>
+            <a:r>
+              <a:rPr lang="en-US" sz="1400" dirty="0"/>
+              <a:t> = AVERAGE(</a:t>
+            </a:r>
+            <a:r>
+              <a:rPr lang="en-US" sz="1400" dirty="0" err="1"/>
+              <a:t>Cleaned_railway</a:t>
+            </a:r>
+            <a:r>
+              <a:rPr lang="en-US" sz="1400" dirty="0"/>
+              <a:t>[Price])</a:t>
+            </a:r>
+          </a:p>
+          <a:p>
+            <a:pPr algn="just">
+              <a:spcAft>
+                <a:spcPts val="600"/>
+              </a:spcAft>
+              <a:buFont typeface="Wingdings" pitchFamily="2" charset="2"/>
+              <a:buChar char="§"/>
+            </a:pPr>
+            <a:r>
+              <a:rPr lang="en-US" sz="1400" dirty="0" err="1"/>
+              <a:t>max_price</a:t>
+            </a:r>
+            <a:r>
+              <a:rPr lang="en-US" sz="1400" dirty="0"/>
+              <a:t> = MAX(</a:t>
+            </a:r>
+            <a:r>
+              <a:rPr lang="en-US" sz="1400" dirty="0" err="1"/>
+              <a:t>Cleaned_railway</a:t>
+            </a:r>
+            <a:r>
+              <a:rPr lang="en-US" sz="1400" dirty="0"/>
+              <a:t>[Price])</a:t>
+            </a:r>
+          </a:p>
+          <a:p>
+            <a:pPr algn="just">
+              <a:spcAft>
+                <a:spcPts val="600"/>
+              </a:spcAft>
+              <a:buFont typeface="Wingdings" pitchFamily="2" charset="2"/>
+              <a:buChar char="§"/>
+            </a:pPr>
+            <a:r>
+              <a:rPr lang="en-US" sz="1400" dirty="0" err="1"/>
+              <a:t>min_price</a:t>
+            </a:r>
+            <a:r>
+              <a:rPr lang="en-US" sz="1400" dirty="0"/>
+              <a:t> = MIN(</a:t>
+            </a:r>
+            <a:r>
+              <a:rPr lang="en-US" sz="1400" dirty="0" err="1"/>
+              <a:t>Cleaned_railway</a:t>
+            </a:r>
+            <a:r>
+              <a:rPr lang="en-US" sz="1400" dirty="0"/>
+              <a:t>[Price])</a:t>
+            </a:r>
+          </a:p>
+          <a:p>
+            <a:pPr marL="0" lvl="0" indent="0" algn="l" rtl="0">
+              <a:spcBef>
+                <a:spcPts val="0"/>
+              </a:spcBef>
+              <a:spcAft>
+                <a:spcPts val="0"/>
+              </a:spcAft>
+              <a:buNone/>
+            </a:pPr>
+            <a:r>
+              <a:rPr lang="en-US" sz="1400" dirty="0"/>
+              <a:t> </a:t>
+            </a:r>
+            <a:endParaRPr sz="1400" dirty="0"/>
+          </a:p>
+        </p:txBody>
+      </p:sp>
+    </p:spTree>
+    <p:extLst>
+      <p:ext uri="{BB962C8B-B14F-4D97-AF65-F5344CB8AC3E}">
+        <p14:creationId xmlns:p14="http://schemas.microsoft.com/office/powerpoint/2010/main" val="2844832405"/>
+      </p:ext>
+    </p:extLst>
+  </p:cSld>
+  <p:clrMapOvr>
+    <a:masterClrMapping/>
+  </p:clrMapOvr>
+  <mc:AlternateContent xmlns:mc="http://schemas.openxmlformats.org/markup-compatibility/2006" xmlns:p14="http://schemas.microsoft.com/office/powerpoint/2010/main">
+    <mc:Choice Requires="p14">
+      <p:transition spd="slow" p14:dur="3400">
+        <p14:reveal/>
+      </p:transition>
+    </mc:Choice>
+    <mc:Fallback xmlns="">
+      <p:transition spd="slow">
+        <p:fade/>
+      </p:transition>
+    </mc:Fallback>
+  </mc:AlternateContent>
+  <p:timing>
+    <p:tnLst>
+      <p:par>
+        <p:cTn id="1" dur="indefinite" restart="never" nodeType="tmRoot">
+          <p:childTnLst>
+            <p:seq concurrent="1" nextAc="seek">
+              <p:cTn id="2" dur="indefinite" nodeType="mainSeq">
+                <p:childTnLst>
+                  <p:par>
+                    <p:cTn id="3" fill="hold">
+                      <p:stCondLst>
+                        <p:cond delay="indefinite"/>
+                        <p:cond evt="onBegin" delay="0">
+                          <p:tn val="2"/>
+                        </p:cond>
+                      </p:stCondLst>
+                      <p:childTnLst>
+                        <p:par>
+                          <p:cTn id="4" fill="hold">
+                            <p:stCondLst>
+                              <p:cond delay="0"/>
+                            </p:stCondLst>
+                            <p:childTnLst>
+                              <p:par>
+                                <p:cTn id="5" presetID="47" presetClass="entr" presetSubtype="0" fill="hold" grpId="0" nodeType="afterEffect">
+                                  <p:stCondLst>
+                                    <p:cond delay="0"/>
+                                  </p:stCondLst>
+                                  <p:childTnLst>
+                                    <p:set>
+                                      <p:cBhvr>
+                                        <p:cTn id="6" dur="1" fill="hold">
+                                          <p:stCondLst>
+                                            <p:cond delay="0"/>
+                                          </p:stCondLst>
+                                        </p:cTn>
+                                        <p:tgtEl>
+                                          <p:spTgt spid="403"/>
+                                        </p:tgtEl>
+                                        <p:attrNameLst>
+                                          <p:attrName>style.visibility</p:attrName>
+                                        </p:attrNameLst>
+                                      </p:cBhvr>
+                                      <p:to>
+                                        <p:strVal val="visible"/>
+                                      </p:to>
+                                    </p:set>
+                                    <p:animEffect transition="in" filter="fade">
+                                      <p:cBhvr>
+                                        <p:cTn id="7" dur="1000"/>
+                                        <p:tgtEl>
+                                          <p:spTgt spid="403"/>
+                                        </p:tgtEl>
+                                      </p:cBhvr>
+                                    </p:animEffect>
+                                    <p:anim calcmode="lin" valueType="num">
+                                      <p:cBhvr>
+                                        <p:cTn id="8" dur="1000" fill="hold"/>
+                                        <p:tgtEl>
+                                          <p:spTgt spid="403"/>
+                                        </p:tgtEl>
+                                        <p:attrNameLst>
+                                          <p:attrName>ppt_x</p:attrName>
+                                        </p:attrNameLst>
+                                      </p:cBhvr>
+                                      <p:tavLst>
+                                        <p:tav tm="0">
+                                          <p:val>
+                                            <p:strVal val="#ppt_x"/>
+                                          </p:val>
+                                        </p:tav>
+                                        <p:tav tm="100000">
+                                          <p:val>
+                                            <p:strVal val="#ppt_x"/>
+                                          </p:val>
+                                        </p:tav>
+                                      </p:tavLst>
+                                    </p:anim>
+                                    <p:anim calcmode="lin" valueType="num">
+                                      <p:cBhvr>
+                                        <p:cTn id="9" dur="1000" fill="hold"/>
+                                        <p:tgtEl>
+                                          <p:spTgt spid="403"/>
+                                        </p:tgtEl>
+                                        <p:attrNameLst>
+                                          <p:attrName>ppt_y</p:attrName>
+                                        </p:attrNameLst>
+                                      </p:cBhvr>
+                                      <p:tavLst>
+                                        <p:tav tm="0">
+                                          <p:val>
+                                            <p:strVal val="#ppt_y-.1"/>
+                                          </p:val>
+                                        </p:tav>
+                                        <p:tav tm="100000">
+                                          <p:val>
+                                            <p:strVal val="#ppt_y"/>
+                                          </p:val>
+                                        </p:tav>
+                                      </p:tavLst>
+                                    </p:anim>
+                                  </p:childTnLst>
+                                </p:cTn>
+                              </p:par>
+                            </p:childTnLst>
+                          </p:cTn>
+                        </p:par>
+                      </p:childTnLst>
+                    </p:cTn>
+                  </p:par>
+                  <p:par>
+                    <p:cTn id="10" fill="hold">
+                      <p:stCondLst>
+                        <p:cond delay="indefinite"/>
+                      </p:stCondLst>
+                      <p:childTnLst>
+                        <p:par>
+                          <p:cTn id="11" fill="hold">
+                            <p:stCondLst>
+                              <p:cond delay="0"/>
+                            </p:stCondLst>
+                            <p:childTnLst>
+                              <p:par>
+                                <p:cTn id="12" presetID="47" presetClass="entr" presetSubtype="0" fill="hold" grpId="0" nodeType="clickEffect">
+                                  <p:stCondLst>
+                                    <p:cond delay="0"/>
+                                  </p:stCondLst>
+                                  <p:childTnLst>
+                                    <p:set>
+                                      <p:cBhvr>
+                                        <p:cTn id="13" dur="1" fill="hold">
+                                          <p:stCondLst>
+                                            <p:cond delay="0"/>
+                                          </p:stCondLst>
+                                        </p:cTn>
+                                        <p:tgtEl>
+                                          <p:spTgt spid="404"/>
+                                        </p:tgtEl>
+                                        <p:attrNameLst>
+                                          <p:attrName>style.visibility</p:attrName>
+                                        </p:attrNameLst>
+                                      </p:cBhvr>
+                                      <p:to>
+                                        <p:strVal val="visible"/>
+                                      </p:to>
+                                    </p:set>
+                                    <p:animEffect transition="in" filter="fade">
+                                      <p:cBhvr>
+                                        <p:cTn id="14" dur="1000"/>
+                                        <p:tgtEl>
+                                          <p:spTgt spid="404"/>
+                                        </p:tgtEl>
+                                      </p:cBhvr>
+                                    </p:animEffect>
+                                    <p:anim calcmode="lin" valueType="num">
+                                      <p:cBhvr>
+                                        <p:cTn id="15" dur="1000" fill="hold"/>
+                                        <p:tgtEl>
+                                          <p:spTgt spid="404"/>
+                                        </p:tgtEl>
+                                        <p:attrNameLst>
+                                          <p:attrName>ppt_x</p:attrName>
+                                        </p:attrNameLst>
+                                      </p:cBhvr>
+                                      <p:tavLst>
+                                        <p:tav tm="0">
+                                          <p:val>
+                                            <p:strVal val="#ppt_x"/>
+                                          </p:val>
+                                        </p:tav>
+                                        <p:tav tm="100000">
+                                          <p:val>
+                                            <p:strVal val="#ppt_x"/>
+                                          </p:val>
+                                        </p:tav>
+                                      </p:tavLst>
+                                    </p:anim>
+                                    <p:anim calcmode="lin" valueType="num">
+                                      <p:cBhvr>
+                                        <p:cTn id="16" dur="1000" fill="hold"/>
+                                        <p:tgtEl>
+                                          <p:spTgt spid="404"/>
+                                        </p:tgtEl>
+                                        <p:attrNameLst>
+                                          <p:attrName>ppt_y</p:attrName>
+                                        </p:attrNameLst>
+                                      </p:cBhvr>
+                                      <p:tavLst>
+                                        <p:tav tm="0">
+                                          <p:val>
+                                            <p:strVal val="#ppt_y-.1"/>
+                                          </p:val>
+                                        </p:tav>
+                                        <p:tav tm="100000">
+                                          <p:val>
+                                            <p:strVal val="#ppt_y"/>
+                                          </p:val>
+                                        </p:tav>
+                                      </p:tavLst>
+                                    </p:anim>
+                                  </p:childTnLst>
+                                </p:cTn>
+                              </p:par>
+                            </p:childTnLst>
+                          </p:cTn>
+                        </p:par>
+                      </p:childTnLst>
+                    </p:cTn>
+                  </p:par>
+                  <p:par>
+                    <p:cTn id="17" fill="hold">
+                      <p:stCondLst>
+                        <p:cond delay="indefinite"/>
+                      </p:stCondLst>
+                      <p:childTnLst>
+                        <p:par>
+                          <p:cTn id="18" fill="hold">
+                            <p:stCondLst>
+                              <p:cond delay="0"/>
+                            </p:stCondLst>
+                            <p:childTnLst>
+                              <p:par>
+                                <p:cTn id="19" presetID="22" presetClass="entr" presetSubtype="1" fill="hold" grpId="0" nodeType="clickEffect">
+                                  <p:stCondLst>
+                                    <p:cond delay="0"/>
+                                  </p:stCondLst>
+                                  <p:childTnLst>
+                                    <p:set>
+                                      <p:cBhvr>
+                                        <p:cTn id="20" dur="1" fill="hold">
+                                          <p:stCondLst>
+                                            <p:cond delay="0"/>
+                                          </p:stCondLst>
+                                        </p:cTn>
+                                        <p:tgtEl>
+                                          <p:spTgt spid="406">
+                                            <p:txEl>
+                                              <p:pRg st="0" end="0"/>
+                                            </p:txEl>
+                                          </p:spTgt>
+                                        </p:tgtEl>
+                                        <p:attrNameLst>
+                                          <p:attrName>style.visibility</p:attrName>
+                                        </p:attrNameLst>
+                                      </p:cBhvr>
+                                      <p:to>
+                                        <p:strVal val="visible"/>
+                                      </p:to>
+                                    </p:set>
+                                    <p:animEffect transition="in" filter="wipe(up)">
+                                      <p:cBhvr>
+                                        <p:cTn id="21" dur="1000"/>
+                                        <p:tgtEl>
+                                          <p:spTgt spid="406">
+                                            <p:txEl>
+                                              <p:pRg st="0" end="0"/>
+                                            </p:txEl>
+                                          </p:spTgt>
+                                        </p:tgtEl>
+                                      </p:cBhvr>
+                                    </p:animEffect>
+                                  </p:childTnLst>
+                                </p:cTn>
+                              </p:par>
+                            </p:childTnLst>
+                          </p:cTn>
+                        </p:par>
+                      </p:childTnLst>
+                    </p:cTn>
+                  </p:par>
+                  <p:par>
+                    <p:cTn id="22" fill="hold">
+                      <p:stCondLst>
+                        <p:cond delay="indefinite"/>
+                      </p:stCondLst>
+                      <p:childTnLst>
+                        <p:par>
+                          <p:cTn id="23" fill="hold">
+                            <p:stCondLst>
+                              <p:cond delay="0"/>
+                            </p:stCondLst>
+                            <p:childTnLst>
+                              <p:par>
+                                <p:cTn id="24" presetID="22" presetClass="entr" presetSubtype="1" fill="hold" grpId="0" nodeType="clickEffect">
+                                  <p:stCondLst>
+                                    <p:cond delay="0"/>
+                                  </p:stCondLst>
+                                  <p:childTnLst>
+                                    <p:set>
+                                      <p:cBhvr>
+                                        <p:cTn id="25" dur="1" fill="hold">
+                                          <p:stCondLst>
+                                            <p:cond delay="0"/>
+                                          </p:stCondLst>
+                                        </p:cTn>
+                                        <p:tgtEl>
+                                          <p:spTgt spid="406">
+                                            <p:txEl>
+                                              <p:pRg st="1" end="1"/>
+                                            </p:txEl>
+                                          </p:spTgt>
+                                        </p:tgtEl>
+                                        <p:attrNameLst>
+                                          <p:attrName>style.visibility</p:attrName>
+                                        </p:attrNameLst>
+                                      </p:cBhvr>
+                                      <p:to>
+                                        <p:strVal val="visible"/>
+                                      </p:to>
+                                    </p:set>
+                                    <p:animEffect transition="in" filter="wipe(up)">
+                                      <p:cBhvr>
+                                        <p:cTn id="26" dur="1000"/>
+                                        <p:tgtEl>
+                                          <p:spTgt spid="406">
+                                            <p:txEl>
+                                              <p:pRg st="1" end="1"/>
+                                            </p:txEl>
+                                          </p:spTgt>
+                                        </p:tgtEl>
+                                      </p:cBhvr>
+                                    </p:animEffect>
+                                  </p:childTnLst>
+                                </p:cTn>
+                              </p:par>
+                            </p:childTnLst>
+                          </p:cTn>
+                        </p:par>
+                      </p:childTnLst>
+                    </p:cTn>
+                  </p:par>
+                  <p:par>
+                    <p:cTn id="27" fill="hold">
+                      <p:stCondLst>
+                        <p:cond delay="indefinite"/>
+                      </p:stCondLst>
+                      <p:childTnLst>
+                        <p:par>
+                          <p:cTn id="28" fill="hold">
+                            <p:stCondLst>
+                              <p:cond delay="0"/>
+                            </p:stCondLst>
+                            <p:childTnLst>
+                              <p:par>
+                                <p:cTn id="29" presetID="22" presetClass="entr" presetSubtype="1" fill="hold" grpId="0" nodeType="clickEffect">
+                                  <p:stCondLst>
+                                    <p:cond delay="0"/>
+                                  </p:stCondLst>
+                                  <p:childTnLst>
+                                    <p:set>
+                                      <p:cBhvr>
+                                        <p:cTn id="30" dur="1" fill="hold">
+                                          <p:stCondLst>
+                                            <p:cond delay="0"/>
+                                          </p:stCondLst>
+                                        </p:cTn>
+                                        <p:tgtEl>
+                                          <p:spTgt spid="406">
+                                            <p:txEl>
+                                              <p:pRg st="2" end="2"/>
+                                            </p:txEl>
+                                          </p:spTgt>
+                                        </p:tgtEl>
+                                        <p:attrNameLst>
+                                          <p:attrName>style.visibility</p:attrName>
+                                        </p:attrNameLst>
+                                      </p:cBhvr>
+                                      <p:to>
+                                        <p:strVal val="visible"/>
+                                      </p:to>
+                                    </p:set>
+                                    <p:animEffect transition="in" filter="wipe(up)">
+                                      <p:cBhvr>
+                                        <p:cTn id="31" dur="1000"/>
+                                        <p:tgtEl>
+                                          <p:spTgt spid="406">
+                                            <p:txEl>
+                                              <p:pRg st="2" end="2"/>
+                                            </p:txEl>
+                                          </p:spTgt>
+                                        </p:tgtEl>
+                                      </p:cBhvr>
+                                    </p:animEffect>
+                                  </p:childTnLst>
+                                </p:cTn>
+                              </p:par>
+                            </p:childTnLst>
+                          </p:cTn>
+                        </p:par>
+                      </p:childTnLst>
+                    </p:cTn>
+                  </p:par>
+                  <p:par>
+                    <p:cTn id="32" fill="hold">
+                      <p:stCondLst>
+                        <p:cond delay="indefinite"/>
+                      </p:stCondLst>
+                      <p:childTnLst>
+                        <p:par>
+                          <p:cTn id="33" fill="hold">
+                            <p:stCondLst>
+                              <p:cond delay="0"/>
+                            </p:stCondLst>
+                            <p:childTnLst>
+                              <p:par>
+                                <p:cTn id="34" presetID="22" presetClass="entr" presetSubtype="1" fill="hold" grpId="0" nodeType="clickEffect">
+                                  <p:stCondLst>
+                                    <p:cond delay="0"/>
+                                  </p:stCondLst>
+                                  <p:childTnLst>
+                                    <p:set>
+                                      <p:cBhvr>
+                                        <p:cTn id="35" dur="1" fill="hold">
+                                          <p:stCondLst>
+                                            <p:cond delay="0"/>
+                                          </p:stCondLst>
+                                        </p:cTn>
+                                        <p:tgtEl>
+                                          <p:spTgt spid="406">
+                                            <p:txEl>
+                                              <p:pRg st="3" end="3"/>
+                                            </p:txEl>
+                                          </p:spTgt>
+                                        </p:tgtEl>
+                                        <p:attrNameLst>
+                                          <p:attrName>style.visibility</p:attrName>
+                                        </p:attrNameLst>
+                                      </p:cBhvr>
+                                      <p:to>
+                                        <p:strVal val="visible"/>
+                                      </p:to>
+                                    </p:set>
+                                    <p:animEffect transition="in" filter="wipe(up)">
+                                      <p:cBhvr>
+                                        <p:cTn id="36" dur="1000"/>
+                                        <p:tgtEl>
+                                          <p:spTgt spid="406">
+                                            <p:txEl>
+                                              <p:pRg st="3" end="3"/>
+                                            </p:txEl>
+                                          </p:spTgt>
+                                        </p:tgtEl>
+                                      </p:cBhvr>
+                                    </p:animEffect>
+                                  </p:childTnLst>
+                                </p:cTn>
+                              </p:par>
+                            </p:childTnLst>
+                          </p:cTn>
+                        </p:par>
+                      </p:childTnLst>
+                    </p:cTn>
+                  </p:par>
+                  <p:par>
+                    <p:cTn id="37" fill="hold">
+                      <p:stCondLst>
+                        <p:cond delay="indefinite"/>
+                      </p:stCondLst>
+                      <p:childTnLst>
+                        <p:par>
+                          <p:cTn id="38" fill="hold">
+                            <p:stCondLst>
+                              <p:cond delay="0"/>
+                            </p:stCondLst>
+                            <p:childTnLst>
+                              <p:par>
+                                <p:cTn id="39" presetID="22" presetClass="entr" presetSubtype="1" fill="hold" grpId="0" nodeType="clickEffect">
+                                  <p:stCondLst>
+                                    <p:cond delay="0"/>
+                                  </p:stCondLst>
+                                  <p:childTnLst>
+                                    <p:set>
+                                      <p:cBhvr>
+                                        <p:cTn id="40" dur="1" fill="hold">
+                                          <p:stCondLst>
+                                            <p:cond delay="0"/>
+                                          </p:stCondLst>
+                                        </p:cTn>
+                                        <p:tgtEl>
+                                          <p:spTgt spid="406">
+                                            <p:txEl>
+                                              <p:pRg st="4" end="4"/>
+                                            </p:txEl>
+                                          </p:spTgt>
+                                        </p:tgtEl>
+                                        <p:attrNameLst>
+                                          <p:attrName>style.visibility</p:attrName>
+                                        </p:attrNameLst>
+                                      </p:cBhvr>
+                                      <p:to>
+                                        <p:strVal val="visible"/>
+                                      </p:to>
+                                    </p:set>
+                                    <p:animEffect transition="in" filter="wipe(up)">
+                                      <p:cBhvr>
+                                        <p:cTn id="41" dur="1000"/>
+                                        <p:tgtEl>
+                                          <p:spTgt spid="406">
+                                            <p:txEl>
+                                              <p:pRg st="4" end="4"/>
+                                            </p:txEl>
+                                          </p:spTgt>
+                                        </p:tgtEl>
+                                      </p:cBhvr>
+                                    </p:animEffect>
+                                  </p:childTnLst>
+                                </p:cTn>
+                              </p:par>
+                            </p:childTnLst>
+                          </p:cTn>
+                        </p:par>
+                      </p:childTnLst>
+                    </p:cTn>
+                  </p:par>
+                  <p:par>
+                    <p:cTn id="42" fill="hold">
+                      <p:stCondLst>
+                        <p:cond delay="indefinite"/>
+                      </p:stCondLst>
+                      <p:childTnLst>
+                        <p:par>
+                          <p:cTn id="43" fill="hold">
+                            <p:stCondLst>
+                              <p:cond delay="0"/>
+                            </p:stCondLst>
+                            <p:childTnLst>
+                              <p:par>
+                                <p:cTn id="44" presetID="22" presetClass="entr" presetSubtype="1" fill="hold" grpId="0" nodeType="clickEffect">
+                                  <p:stCondLst>
+                                    <p:cond delay="0"/>
+                                  </p:stCondLst>
+                                  <p:childTnLst>
+                                    <p:set>
+                                      <p:cBhvr>
+                                        <p:cTn id="45" dur="1" fill="hold">
+                                          <p:stCondLst>
+                                            <p:cond delay="0"/>
+                                          </p:stCondLst>
+                                        </p:cTn>
+                                        <p:tgtEl>
+                                          <p:spTgt spid="406">
+                                            <p:txEl>
+                                              <p:pRg st="5" end="5"/>
+                                            </p:txEl>
+                                          </p:spTgt>
+                                        </p:tgtEl>
+                                        <p:attrNameLst>
+                                          <p:attrName>style.visibility</p:attrName>
+                                        </p:attrNameLst>
+                                      </p:cBhvr>
+                                      <p:to>
+                                        <p:strVal val="visible"/>
+                                      </p:to>
+                                    </p:set>
+                                    <p:animEffect transition="in" filter="wipe(up)">
+                                      <p:cBhvr>
+                                        <p:cTn id="46" dur="1000"/>
+                                        <p:tgtEl>
+                                          <p:spTgt spid="406">
+                                            <p:txEl>
+                                              <p:pRg st="5" end="5"/>
+                                            </p:txEl>
+                                          </p:spTgt>
+                                        </p:tgtEl>
+                                      </p:cBhvr>
+                                    </p:animEffect>
+                                  </p:childTnLst>
+                                </p:cTn>
+                              </p:par>
+                            </p:childTnLst>
+                          </p:cTn>
+                        </p:par>
+                      </p:childTnLst>
+                    </p:cTn>
+                  </p:par>
+                  <p:par>
+                    <p:cTn id="47" fill="hold">
+                      <p:stCondLst>
+                        <p:cond delay="indefinite"/>
+                      </p:stCondLst>
+                      <p:childTnLst>
+                        <p:par>
+                          <p:cTn id="48" fill="hold">
+                            <p:stCondLst>
+                              <p:cond delay="0"/>
+                            </p:stCondLst>
+                            <p:childTnLst>
+                              <p:par>
+                                <p:cTn id="49" presetID="22" presetClass="entr" presetSubtype="1" fill="hold" grpId="0" nodeType="clickEffect">
+                                  <p:stCondLst>
+                                    <p:cond delay="0"/>
+                                  </p:stCondLst>
+                                  <p:childTnLst>
+                                    <p:set>
+                                      <p:cBhvr>
+                                        <p:cTn id="50" dur="1" fill="hold">
+                                          <p:stCondLst>
+                                            <p:cond delay="0"/>
+                                          </p:stCondLst>
+                                        </p:cTn>
+                                        <p:tgtEl>
+                                          <p:spTgt spid="406">
+                                            <p:txEl>
+                                              <p:pRg st="6" end="6"/>
+                                            </p:txEl>
+                                          </p:spTgt>
+                                        </p:tgtEl>
+                                        <p:attrNameLst>
+                                          <p:attrName>style.visibility</p:attrName>
+                                        </p:attrNameLst>
+                                      </p:cBhvr>
+                                      <p:to>
+                                        <p:strVal val="visible"/>
+                                      </p:to>
+                                    </p:set>
+                                    <p:animEffect transition="in" filter="wipe(up)">
+                                      <p:cBhvr>
+                                        <p:cTn id="51" dur="1000"/>
+                                        <p:tgtEl>
+                                          <p:spTgt spid="406">
+                                            <p:txEl>
+                                              <p:pRg st="6" end="6"/>
+                                            </p:txEl>
+                                          </p:spTgt>
+                                        </p:tgtEl>
+                                      </p:cBhvr>
+                                    </p:animEffect>
+                                  </p:childTnLst>
+                                </p:cTn>
+                              </p:par>
+                            </p:childTnLst>
+                          </p:cTn>
+                        </p:par>
+                      </p:childTnLst>
+                    </p:cTn>
+                  </p:par>
+                  <p:par>
+                    <p:cTn id="52" fill="hold">
+                      <p:stCondLst>
+                        <p:cond delay="indefinite"/>
+                      </p:stCondLst>
+                      <p:childTnLst>
+                        <p:par>
+                          <p:cTn id="53" fill="hold">
+                            <p:stCondLst>
+                              <p:cond delay="0"/>
+                            </p:stCondLst>
+                            <p:childTnLst>
+                              <p:par>
+                                <p:cTn id="54" presetID="22" presetClass="entr" presetSubtype="1" fill="hold" grpId="0" nodeType="clickEffect">
+                                  <p:stCondLst>
+                                    <p:cond delay="0"/>
+                                  </p:stCondLst>
+                                  <p:childTnLst>
+                                    <p:set>
+                                      <p:cBhvr>
+                                        <p:cTn id="55" dur="1" fill="hold">
+                                          <p:stCondLst>
+                                            <p:cond delay="0"/>
+                                          </p:stCondLst>
+                                        </p:cTn>
+                                        <p:tgtEl>
+                                          <p:spTgt spid="406">
+                                            <p:txEl>
+                                              <p:pRg st="7" end="7"/>
+                                            </p:txEl>
+                                          </p:spTgt>
+                                        </p:tgtEl>
+                                        <p:attrNameLst>
+                                          <p:attrName>style.visibility</p:attrName>
+                                        </p:attrNameLst>
+                                      </p:cBhvr>
+                                      <p:to>
+                                        <p:strVal val="visible"/>
+                                      </p:to>
+                                    </p:set>
+                                    <p:animEffect transition="in" filter="wipe(up)">
+                                      <p:cBhvr>
+                                        <p:cTn id="56" dur="1000"/>
+                                        <p:tgtEl>
+                                          <p:spTgt spid="406">
+                                            <p:txEl>
+                                              <p:pRg st="7" end="7"/>
+                                            </p:txEl>
+                                          </p:spTgt>
+                                        </p:tgtEl>
+                                      </p:cBhvr>
+                                    </p:animEffect>
+                                  </p:childTnLst>
+                                </p:cTn>
+                              </p:par>
+                            </p:childTnLst>
+                          </p:cTn>
+                        </p:par>
+                      </p:childTnLst>
+                    </p:cTn>
+                  </p:par>
+                </p:childTnLst>
+              </p:cTn>
+              <p:prevCondLst>
+                <p:cond evt="onPrev" delay="0">
+                  <p:tgtEl>
+                    <p:sldTgt/>
+                  </p:tgtEl>
+                </p:cond>
+              </p:prevCondLst>
+              <p:nextCondLst>
+                <p:cond evt="onNext" delay="0">
+                  <p:tgtEl>
+                    <p:sldTgt/>
+                  </p:tgtEl>
+                </p:cond>
+              </p:nextCondLst>
+            </p:seq>
+          </p:childTnLst>
+        </p:cTn>
+      </p:par>
+    </p:tnLst>
+    <p:bldLst>
+      <p:bldP spid="403" grpId="0"/>
+      <p:bldP spid="404" grpId="0"/>
+      <p:bldP spid="406" grpId="0" build="p"/>
+    </p:bldLst>
+  </p:timing>
+</p:sld>
+</file>
+
+<file path=ppt/slides/slide13.xml><?xml version="1.0" encoding="utf-8"?>
+<p:sld xmlns:a="http://schemas.openxmlformats.org/drawingml/2006/main" xmlns:r="http://schemas.openxmlformats.org/officeDocument/2006/relationships" xmlns:p="http://schemas.openxmlformats.org/presentationml/2006/main">
+  <p:cSld>
+    <p:spTree>
+      <p:nvGrpSpPr>
+        <p:cNvPr id="1" name="Shape 402">
+          <a:extLst>
+            <a:ext uri="{FF2B5EF4-FFF2-40B4-BE49-F238E27FC236}">
+              <a16:creationId xmlns:a16="http://schemas.microsoft.com/office/drawing/2014/main" id="{C696FD41-8E04-C667-E265-FE75F5D8DD65}"/>
+            </a:ext>
+          </a:extLst>
+        </p:cNvPr>
+        <p:cNvGrpSpPr/>
+        <p:nvPr/>
+      </p:nvGrpSpPr>
+      <p:grpSpPr>
+        <a:xfrm>
+          <a:off x="0" y="0"/>
+          <a:ext cx="0" cy="0"/>
+          <a:chOff x="0" y="0"/>
+          <a:chExt cx="0" cy="0"/>
+        </a:xfrm>
+      </p:grpSpPr>
+      <p:sp>
+        <p:nvSpPr>
+          <p:cNvPr id="403" name="Google Shape;403;p42">
+            <a:extLst>
+              <a:ext uri="{FF2B5EF4-FFF2-40B4-BE49-F238E27FC236}">
+                <a16:creationId xmlns:a16="http://schemas.microsoft.com/office/drawing/2014/main" id="{4B821577-5895-1080-50BE-ED23C90576AC}"/>
+              </a:ext>
+            </a:extLst>
+          </p:cNvPr>
+          <p:cNvSpPr txBox="1">
+            <a:spLocks noGrp="1"/>
+          </p:cNvSpPr>
+          <p:nvPr>
+            <p:ph type="title"/>
+          </p:nvPr>
+        </p:nvSpPr>
+        <p:spPr>
+          <a:xfrm>
+            <a:off x="720000" y="538492"/>
+            <a:ext cx="7704000" cy="572700"/>
+          </a:xfrm>
+          <a:prstGeom prst="rect">
+            <a:avLst/>
+          </a:prstGeom>
+        </p:spPr>
+        <p:txBody>
+          <a:bodyPr spcFirstLastPara="1" wrap="square" lIns="91425" tIns="91425" rIns="91425" bIns="91425" anchor="t" anchorCtr="0">
+            <a:noAutofit/>
+          </a:bodyPr>
+          <a:lstStyle/>
+          <a:p>
+            <a:pPr lvl="0"/>
+            <a:r>
+              <a:rPr lang="en-US" dirty="0"/>
+              <a:t>DAX</a:t>
+            </a:r>
+            <a:endParaRPr dirty="0"/>
+          </a:p>
+        </p:txBody>
+      </p:sp>
+      <p:pic>
+        <p:nvPicPr>
+          <p:cNvPr id="6" name="Picture 5">
+            <a:extLst>
+              <a:ext uri="{FF2B5EF4-FFF2-40B4-BE49-F238E27FC236}">
+                <a16:creationId xmlns:a16="http://schemas.microsoft.com/office/drawing/2014/main" id="{26682EF1-20DC-4720-2CC9-2B3C82671A65}"/>
+              </a:ext>
+            </a:extLst>
+          </p:cNvPr>
+          <p:cNvPicPr>
+            <a:picLocks noChangeAspect="1"/>
+          </p:cNvPicPr>
+          <p:nvPr/>
+        </p:nvPicPr>
+        <p:blipFill>
+          <a:blip r:embed="rId3"/>
+          <a:srcRect t="4671" b="5707"/>
+          <a:stretch>
+            <a:fillRect/>
+          </a:stretch>
+        </p:blipFill>
+        <p:spPr>
+          <a:xfrm>
+            <a:off x="720000" y="1266164"/>
+            <a:ext cx="6848588" cy="3451260"/>
+          </a:xfrm>
+          <a:prstGeom prst="rect">
+            <a:avLst/>
+          </a:prstGeom>
+        </p:spPr>
+      </p:pic>
+    </p:spTree>
+    <p:extLst>
+      <p:ext uri="{BB962C8B-B14F-4D97-AF65-F5344CB8AC3E}">
+        <p14:creationId xmlns:p14="http://schemas.microsoft.com/office/powerpoint/2010/main" val="2183353208"/>
+      </p:ext>
+    </p:extLst>
+  </p:cSld>
+  <p:clrMapOvr>
+    <a:masterClrMapping/>
+  </p:clrMapOvr>
+  <mc:AlternateContent xmlns:mc="http://schemas.openxmlformats.org/markup-compatibility/2006" xmlns:p14="http://schemas.microsoft.com/office/powerpoint/2010/main">
+    <mc:Choice Requires="p14">
+      <p:transition spd="slow" p14:dur="3400">
+        <p14:reveal/>
+      </p:transition>
+    </mc:Choice>
+    <mc:Fallback xmlns="">
+      <p:transition spd="slow">
+        <p:fade/>
+      </p:transition>
+    </mc:Fallback>
+  </mc:AlternateContent>
+  <p:timing>
+    <p:tnLst>
+      <p:par>
+        <p:cTn id="1" dur="indefinite" restart="never" nodeType="tmRoot">
+          <p:childTnLst>
+            <p:seq concurrent="1" nextAc="seek">
+              <p:cTn id="2" dur="indefinite" nodeType="mainSeq">
+                <p:childTnLst>
+                  <p:par>
+                    <p:cTn id="3" fill="hold">
+                      <p:stCondLst>
+                        <p:cond delay="indefinite"/>
+                        <p:cond evt="onBegin" delay="0">
+                          <p:tn val="2"/>
+                        </p:cond>
+                      </p:stCondLst>
+                      <p:childTnLst>
+                        <p:par>
+                          <p:cTn id="4" fill="hold">
+                            <p:stCondLst>
+                              <p:cond delay="0"/>
+                            </p:stCondLst>
+                            <p:childTnLst>
+                              <p:par>
+                                <p:cTn id="5" presetID="47" presetClass="entr" presetSubtype="0" fill="hold" grpId="0" nodeType="afterEffect">
+                                  <p:stCondLst>
+                                    <p:cond delay="0"/>
+                                  </p:stCondLst>
+                                  <p:childTnLst>
+                                    <p:set>
+                                      <p:cBhvr>
+                                        <p:cTn id="6" dur="1" fill="hold">
+                                          <p:stCondLst>
+                                            <p:cond delay="0"/>
+                                          </p:stCondLst>
+                                        </p:cTn>
+                                        <p:tgtEl>
+                                          <p:spTgt spid="403"/>
+                                        </p:tgtEl>
+                                        <p:attrNameLst>
+                                          <p:attrName>style.visibility</p:attrName>
+                                        </p:attrNameLst>
+                                      </p:cBhvr>
+                                      <p:to>
+                                        <p:strVal val="visible"/>
+                                      </p:to>
+                                    </p:set>
+                                    <p:animEffect transition="in" filter="fade">
+                                      <p:cBhvr>
+                                        <p:cTn id="7" dur="1000"/>
+                                        <p:tgtEl>
+                                          <p:spTgt spid="403"/>
+                                        </p:tgtEl>
+                                      </p:cBhvr>
+                                    </p:animEffect>
+                                    <p:anim calcmode="lin" valueType="num">
+                                      <p:cBhvr>
+                                        <p:cTn id="8" dur="1000" fill="hold"/>
+                                        <p:tgtEl>
+                                          <p:spTgt spid="403"/>
+                                        </p:tgtEl>
+                                        <p:attrNameLst>
+                                          <p:attrName>ppt_x</p:attrName>
+                                        </p:attrNameLst>
+                                      </p:cBhvr>
+                                      <p:tavLst>
+                                        <p:tav tm="0">
+                                          <p:val>
+                                            <p:strVal val="#ppt_x"/>
+                                          </p:val>
+                                        </p:tav>
+                                        <p:tav tm="100000">
+                                          <p:val>
+                                            <p:strVal val="#ppt_x"/>
+                                          </p:val>
+                                        </p:tav>
+                                      </p:tavLst>
+                                    </p:anim>
+                                    <p:anim calcmode="lin" valueType="num">
+                                      <p:cBhvr>
+                                        <p:cTn id="9" dur="1000" fill="hold"/>
+                                        <p:tgtEl>
+                                          <p:spTgt spid="403"/>
+                                        </p:tgtEl>
+                                        <p:attrNameLst>
+                                          <p:attrName>ppt_y</p:attrName>
+                                        </p:attrNameLst>
+                                      </p:cBhvr>
+                                      <p:tavLst>
+                                        <p:tav tm="0">
+                                          <p:val>
+                                            <p:strVal val="#ppt_y-.1"/>
+                                          </p:val>
+                                        </p:tav>
+                                        <p:tav tm="100000">
+                                          <p:val>
+                                            <p:strVal val="#ppt_y"/>
+                                          </p:val>
+                                        </p:tav>
+                                      </p:tavLst>
+                                    </p:anim>
+                                  </p:childTnLst>
+                                </p:cTn>
+                              </p:par>
+                            </p:childTnLst>
+                          </p:cTn>
+                        </p:par>
+                      </p:childTnLst>
+                    </p:cTn>
+                  </p:par>
+                  <p:par>
+                    <p:cTn id="10" fill="hold">
+                      <p:stCondLst>
+                        <p:cond delay="indefinite"/>
+                      </p:stCondLst>
+                      <p:childTnLst>
+                        <p:par>
+                          <p:cTn id="11" fill="hold">
+                            <p:stCondLst>
+                              <p:cond delay="0"/>
+                            </p:stCondLst>
+                            <p:childTnLst>
+                              <p:par>
+                                <p:cTn id="12" presetID="42" presetClass="entr" presetSubtype="0" fill="hold" nodeType="clickEffect">
+                                  <p:stCondLst>
+                                    <p:cond delay="0"/>
+                                  </p:stCondLst>
+                                  <p:childTnLst>
+                                    <p:set>
+                                      <p:cBhvr>
+                                        <p:cTn id="13" dur="1" fill="hold">
+                                          <p:stCondLst>
+                                            <p:cond delay="0"/>
+                                          </p:stCondLst>
+                                        </p:cTn>
+                                        <p:tgtEl>
+                                          <p:spTgt spid="6"/>
+                                        </p:tgtEl>
+                                        <p:attrNameLst>
+                                          <p:attrName>style.visibility</p:attrName>
+                                        </p:attrNameLst>
+                                      </p:cBhvr>
+                                      <p:to>
+                                        <p:strVal val="visible"/>
+                                      </p:to>
+                                    </p:set>
+                                    <p:animEffect transition="in" filter="fade">
+                                      <p:cBhvr>
+                                        <p:cTn id="14" dur="1000"/>
+                                        <p:tgtEl>
+                                          <p:spTgt spid="6"/>
+                                        </p:tgtEl>
+                                      </p:cBhvr>
+                                    </p:animEffect>
+                                    <p:anim calcmode="lin" valueType="num">
+                                      <p:cBhvr>
+                                        <p:cTn id="15" dur="1000" fill="hold"/>
+                                        <p:tgtEl>
+                                          <p:spTgt spid="6"/>
+                                        </p:tgtEl>
+                                        <p:attrNameLst>
+                                          <p:attrName>ppt_x</p:attrName>
+                                        </p:attrNameLst>
+                                      </p:cBhvr>
+                                      <p:tavLst>
+                                        <p:tav tm="0">
+                                          <p:val>
+                                            <p:strVal val="#ppt_x"/>
+                                          </p:val>
+                                        </p:tav>
+                                        <p:tav tm="100000">
+                                          <p:val>
+                                            <p:strVal val="#ppt_x"/>
+                                          </p:val>
+                                        </p:tav>
+                                      </p:tavLst>
+                                    </p:anim>
+                                    <p:anim calcmode="lin" valueType="num">
+                                      <p:cBhvr>
+                                        <p:cTn id="16" dur="1000" fill="hold"/>
+                                        <p:tgtEl>
+                                          <p:spTgt spid="6"/>
+                                        </p:tgtEl>
+                                        <p:attrNameLst>
+                                          <p:attrName>ppt_y</p:attrName>
+                                        </p:attrNameLst>
+                                      </p:cBhvr>
+                                      <p:tavLst>
+                                        <p:tav tm="0">
+                                          <p:val>
+                                            <p:strVal val="#ppt_y+.1"/>
+                                          </p:val>
+                                        </p:tav>
+                                        <p:tav tm="100000">
+                                          <p:val>
+                                            <p:strVal val="#ppt_y"/>
+                                          </p:val>
+                                        </p:tav>
+                                      </p:tavLst>
+                                    </p:anim>
+                                  </p:childTnLst>
+                                </p:cTn>
+                              </p:par>
+                            </p:childTnLst>
+                          </p:cTn>
+                        </p:par>
+                      </p:childTnLst>
+                    </p:cTn>
+                  </p:par>
+                </p:childTnLst>
+              </p:cTn>
+              <p:prevCondLst>
+                <p:cond evt="onPrev" delay="0">
+                  <p:tgtEl>
+                    <p:sldTgt/>
+                  </p:tgtEl>
+                </p:cond>
+              </p:prevCondLst>
+              <p:nextCondLst>
+                <p:cond evt="onNext" delay="0">
+                  <p:tgtEl>
+                    <p:sldTgt/>
+                  </p:tgtEl>
+                </p:cond>
+              </p:nextCondLst>
+            </p:seq>
+          </p:childTnLst>
+        </p:cTn>
+      </p:par>
+    </p:tnLst>
+    <p:bldLst>
+      <p:bldP spid="403" grpId="0"/>
+    </p:bldLst>
+  </p:timing>
+</p:sld>
+</file>
+
+<file path=ppt/slides/slide14.xml><?xml version="1.0" encoding="utf-8"?>
+<p:sld xmlns:a="http://schemas.openxmlformats.org/drawingml/2006/main" xmlns:r="http://schemas.openxmlformats.org/officeDocument/2006/relationships" xmlns:p="http://schemas.openxmlformats.org/presentationml/2006/main">
+  <p:cSld>
+    <p:spTree>
+      <p:nvGrpSpPr>
+        <p:cNvPr id="1" name="Shape 402">
+          <a:extLst>
+            <a:ext uri="{FF2B5EF4-FFF2-40B4-BE49-F238E27FC236}">
+              <a16:creationId xmlns:a16="http://schemas.microsoft.com/office/drawing/2014/main" id="{0F8FE94D-1A53-797B-3AF5-D6E3284F0E85}"/>
+            </a:ext>
+          </a:extLst>
+        </p:cNvPr>
+        <p:cNvGrpSpPr/>
+        <p:nvPr/>
+      </p:nvGrpSpPr>
+      <p:grpSpPr>
+        <a:xfrm>
+          <a:off x="0" y="0"/>
+          <a:ext cx="0" cy="0"/>
+          <a:chOff x="0" y="0"/>
+          <a:chExt cx="0" cy="0"/>
+        </a:xfrm>
+      </p:grpSpPr>
+      <p:sp>
+        <p:nvSpPr>
+          <p:cNvPr id="403" name="Google Shape;403;p42">
+            <a:extLst>
+              <a:ext uri="{FF2B5EF4-FFF2-40B4-BE49-F238E27FC236}">
+                <a16:creationId xmlns:a16="http://schemas.microsoft.com/office/drawing/2014/main" id="{C939EA7A-BCD7-15FE-70B0-45C8E985CA33}"/>
+              </a:ext>
+            </a:extLst>
+          </p:cNvPr>
+          <p:cNvSpPr txBox="1">
+            <a:spLocks noGrp="1"/>
+          </p:cNvSpPr>
+          <p:nvPr>
+            <p:ph type="title"/>
+          </p:nvPr>
+        </p:nvSpPr>
+        <p:spPr>
+          <a:xfrm>
+            <a:off x="720000" y="538492"/>
+            <a:ext cx="7704000" cy="572700"/>
+          </a:xfrm>
+          <a:prstGeom prst="rect">
+            <a:avLst/>
+          </a:prstGeom>
+        </p:spPr>
+        <p:txBody>
+          <a:bodyPr spcFirstLastPara="1" wrap="square" lIns="91425" tIns="91425" rIns="91425" bIns="91425" anchor="t" anchorCtr="0">
+            <a:noAutofit/>
+          </a:bodyPr>
+          <a:lstStyle/>
+          <a:p>
+            <a:pPr lvl="0"/>
+            <a:r>
+              <a:rPr lang="en-US" dirty="0"/>
+              <a:t>DAX</a:t>
+            </a:r>
+            <a:endParaRPr dirty="0"/>
+          </a:p>
+        </p:txBody>
+      </p:sp>
+      <p:pic>
+        <p:nvPicPr>
+          <p:cNvPr id="2" name="Picture 1">
+            <a:extLst>
+              <a:ext uri="{FF2B5EF4-FFF2-40B4-BE49-F238E27FC236}">
+                <a16:creationId xmlns:a16="http://schemas.microsoft.com/office/drawing/2014/main" id="{51D8DB3A-F641-FF69-C66C-E33DA3B4DC5B}"/>
+              </a:ext>
+            </a:extLst>
+          </p:cNvPr>
+          <p:cNvPicPr>
+            <a:picLocks noChangeAspect="1"/>
+          </p:cNvPicPr>
+          <p:nvPr/>
+        </p:nvPicPr>
+        <p:blipFill>
+          <a:blip r:embed="rId3"/>
+          <a:srcRect t="4653" b="5448"/>
+          <a:stretch>
+            <a:fillRect/>
+          </a:stretch>
+        </p:blipFill>
+        <p:spPr>
+          <a:xfrm>
+            <a:off x="719999" y="1266164"/>
+            <a:ext cx="6848587" cy="3461923"/>
+          </a:xfrm>
+          <a:prstGeom prst="rect">
+            <a:avLst/>
+          </a:prstGeom>
+        </p:spPr>
+      </p:pic>
+    </p:spTree>
+    <p:extLst>
+      <p:ext uri="{BB962C8B-B14F-4D97-AF65-F5344CB8AC3E}">
+        <p14:creationId xmlns:p14="http://schemas.microsoft.com/office/powerpoint/2010/main" val="4044562136"/>
+      </p:ext>
+    </p:extLst>
+  </p:cSld>
+  <p:clrMapOvr>
+    <a:masterClrMapping/>
+  </p:clrMapOvr>
+  <mc:AlternateContent xmlns:mc="http://schemas.openxmlformats.org/markup-compatibility/2006" xmlns:p14="http://schemas.microsoft.com/office/powerpoint/2010/main">
+    <mc:Choice Requires="p14">
+      <p:transition spd="slow" p14:dur="3400">
+        <p14:reveal/>
+      </p:transition>
+    </mc:Choice>
+    <mc:Fallback xmlns="">
+      <p:transition spd="slow">
+        <p:fade/>
+      </p:transition>
+    </mc:Fallback>
+  </mc:AlternateContent>
+  <p:timing>
+    <p:tnLst>
+      <p:par>
+        <p:cTn id="1" dur="indefinite" restart="never" nodeType="tmRoot">
+          <p:childTnLst>
+            <p:seq concurrent="1" nextAc="seek">
+              <p:cTn id="2" dur="indefinite" nodeType="mainSeq">
+                <p:childTnLst>
+                  <p:par>
+                    <p:cTn id="3" fill="hold">
+                      <p:stCondLst>
+                        <p:cond delay="indefinite"/>
+                        <p:cond evt="onBegin" delay="0">
+                          <p:tn val="2"/>
+                        </p:cond>
+                      </p:stCondLst>
+                      <p:childTnLst>
+                        <p:par>
+                          <p:cTn id="4" fill="hold">
+                            <p:stCondLst>
+                              <p:cond delay="0"/>
+                            </p:stCondLst>
+                            <p:childTnLst>
+                              <p:par>
+                                <p:cTn id="5" presetID="47" presetClass="entr" presetSubtype="0" fill="hold" grpId="0" nodeType="afterEffect">
+                                  <p:stCondLst>
+                                    <p:cond delay="0"/>
+                                  </p:stCondLst>
+                                  <p:childTnLst>
+                                    <p:set>
+                                      <p:cBhvr>
+                                        <p:cTn id="6" dur="1" fill="hold">
+                                          <p:stCondLst>
+                                            <p:cond delay="0"/>
+                                          </p:stCondLst>
+                                        </p:cTn>
+                                        <p:tgtEl>
+                                          <p:spTgt spid="403"/>
+                                        </p:tgtEl>
+                                        <p:attrNameLst>
+                                          <p:attrName>style.visibility</p:attrName>
+                                        </p:attrNameLst>
+                                      </p:cBhvr>
+                                      <p:to>
+                                        <p:strVal val="visible"/>
+                                      </p:to>
+                                    </p:set>
+                                    <p:animEffect transition="in" filter="fade">
+                                      <p:cBhvr>
+                                        <p:cTn id="7" dur="1000"/>
+                                        <p:tgtEl>
+                                          <p:spTgt spid="403"/>
+                                        </p:tgtEl>
+                                      </p:cBhvr>
+                                    </p:animEffect>
+                                    <p:anim calcmode="lin" valueType="num">
+                                      <p:cBhvr>
+                                        <p:cTn id="8" dur="1000" fill="hold"/>
+                                        <p:tgtEl>
+                                          <p:spTgt spid="403"/>
+                                        </p:tgtEl>
+                                        <p:attrNameLst>
+                                          <p:attrName>ppt_x</p:attrName>
+                                        </p:attrNameLst>
+                                      </p:cBhvr>
+                                      <p:tavLst>
+                                        <p:tav tm="0">
+                                          <p:val>
+                                            <p:strVal val="#ppt_x"/>
+                                          </p:val>
+                                        </p:tav>
+                                        <p:tav tm="100000">
+                                          <p:val>
+                                            <p:strVal val="#ppt_x"/>
+                                          </p:val>
+                                        </p:tav>
+                                      </p:tavLst>
+                                    </p:anim>
+                                    <p:anim calcmode="lin" valueType="num">
+                                      <p:cBhvr>
+                                        <p:cTn id="9" dur="1000" fill="hold"/>
+                                        <p:tgtEl>
+                                          <p:spTgt spid="403"/>
+                                        </p:tgtEl>
+                                        <p:attrNameLst>
+                                          <p:attrName>ppt_y</p:attrName>
+                                        </p:attrNameLst>
+                                      </p:cBhvr>
+                                      <p:tavLst>
+                                        <p:tav tm="0">
+                                          <p:val>
+                                            <p:strVal val="#ppt_y-.1"/>
+                                          </p:val>
+                                        </p:tav>
+                                        <p:tav tm="100000">
+                                          <p:val>
+                                            <p:strVal val="#ppt_y"/>
+                                          </p:val>
+                                        </p:tav>
+                                      </p:tavLst>
+                                    </p:anim>
+                                  </p:childTnLst>
+                                </p:cTn>
+                              </p:par>
+                            </p:childTnLst>
+                          </p:cTn>
+                        </p:par>
+                      </p:childTnLst>
+                    </p:cTn>
+                  </p:par>
+                  <p:par>
+                    <p:cTn id="10" fill="hold">
+                      <p:stCondLst>
+                        <p:cond delay="indefinite"/>
+                      </p:stCondLst>
+                      <p:childTnLst>
+                        <p:par>
+                          <p:cTn id="11" fill="hold">
+                            <p:stCondLst>
+                              <p:cond delay="0"/>
+                            </p:stCondLst>
+                            <p:childTnLst>
+                              <p:par>
+                                <p:cTn id="12" presetID="42" presetClass="entr" presetSubtype="0" fill="hold" nodeType="clickEffect">
+                                  <p:stCondLst>
+                                    <p:cond delay="0"/>
+                                  </p:stCondLst>
+                                  <p:childTnLst>
+                                    <p:set>
+                                      <p:cBhvr>
+                                        <p:cTn id="13" dur="1" fill="hold">
+                                          <p:stCondLst>
+                                            <p:cond delay="0"/>
+                                          </p:stCondLst>
+                                        </p:cTn>
+                                        <p:tgtEl>
+                                          <p:spTgt spid="2"/>
+                                        </p:tgtEl>
+                                        <p:attrNameLst>
+                                          <p:attrName>style.visibility</p:attrName>
+                                        </p:attrNameLst>
+                                      </p:cBhvr>
+                                      <p:to>
+                                        <p:strVal val="visible"/>
+                                      </p:to>
+                                    </p:set>
+                                    <p:animEffect transition="in" filter="fade">
+                                      <p:cBhvr>
+                                        <p:cTn id="14" dur="1000"/>
+                                        <p:tgtEl>
+                                          <p:spTgt spid="2"/>
+                                        </p:tgtEl>
+                                      </p:cBhvr>
+                                    </p:animEffect>
+                                    <p:anim calcmode="lin" valueType="num">
+                                      <p:cBhvr>
+                                        <p:cTn id="15" dur="1000" fill="hold"/>
+                                        <p:tgtEl>
+                                          <p:spTgt spid="2"/>
+                                        </p:tgtEl>
+                                        <p:attrNameLst>
+                                          <p:attrName>ppt_x</p:attrName>
+                                        </p:attrNameLst>
+                                      </p:cBhvr>
+                                      <p:tavLst>
+                                        <p:tav tm="0">
+                                          <p:val>
+                                            <p:strVal val="#ppt_x"/>
+                                          </p:val>
+                                        </p:tav>
+                                        <p:tav tm="100000">
+                                          <p:val>
+                                            <p:strVal val="#ppt_x"/>
+                                          </p:val>
+                                        </p:tav>
+                                      </p:tavLst>
+                                    </p:anim>
+                                    <p:anim calcmode="lin" valueType="num">
+                                      <p:cBhvr>
+                                        <p:cTn id="16" dur="1000" fill="hold"/>
+                                        <p:tgtEl>
+                                          <p:spTgt spid="2"/>
+                                        </p:tgtEl>
+                                        <p:attrNameLst>
+                                          <p:attrName>ppt_y</p:attrName>
+                                        </p:attrNameLst>
+                                      </p:cBhvr>
+                                      <p:tavLst>
+                                        <p:tav tm="0">
+                                          <p:val>
+                                            <p:strVal val="#ppt_y+.1"/>
+                                          </p:val>
+                                        </p:tav>
+                                        <p:tav tm="100000">
+                                          <p:val>
+                                            <p:strVal val="#ppt_y"/>
+                                          </p:val>
+                                        </p:tav>
+                                      </p:tavLst>
+                                    </p:anim>
+                                  </p:childTnLst>
+                                </p:cTn>
+                              </p:par>
+                            </p:childTnLst>
+                          </p:cTn>
+                        </p:par>
+                      </p:childTnLst>
+                    </p:cTn>
+                  </p:par>
+                </p:childTnLst>
+              </p:cTn>
+              <p:prevCondLst>
+                <p:cond evt="onPrev" delay="0">
+                  <p:tgtEl>
+                    <p:sldTgt/>
+                  </p:tgtEl>
+                </p:cond>
+              </p:prevCondLst>
+              <p:nextCondLst>
+                <p:cond evt="onNext" delay="0">
+                  <p:tgtEl>
+                    <p:sldTgt/>
+                  </p:tgtEl>
+                </p:cond>
+              </p:nextCondLst>
+            </p:seq>
+          </p:childTnLst>
+        </p:cTn>
+      </p:par>
+    </p:tnLst>
+    <p:bldLst>
+      <p:bldP spid="403" grpId="0"/>
+    </p:bldLst>
+  </p:timing>
+</p:sld>
+</file>
+
+<file path=ppt/slides/slide15.xml><?xml version="1.0" encoding="utf-8"?>
 <p:sld xmlns:a="http://schemas.openxmlformats.org/drawingml/2006/main" xmlns:r="http://schemas.openxmlformats.org/officeDocument/2006/relationships" xmlns:p="http://schemas.openxmlformats.org/presentationml/2006/main">
   <p:cSld>
     <p:spTree>
@@ -13089,13 +16374,13 @@
   <p:clrMapOvr>
     <a:masterClrMapping/>
   </p:clrMapOvr>
-  <mc:AlternateContent xmlns:mc="http://schemas.openxmlformats.org/markup-compatibility/2006">
-    <mc:Choice xmlns:p15="http://schemas.microsoft.com/office/powerpoint/2012/main" Requires="p15">
+  <mc:AlternateContent xmlns:mc="http://schemas.openxmlformats.org/markup-compatibility/2006" xmlns:p15="http://schemas.microsoft.com/office/powerpoint/2012/main">
+    <mc:Choice Requires="p15">
       <p:transition xmlns:p14="http://schemas.microsoft.com/office/powerpoint/2010/main" spd="slow" p14:dur="1250">
         <p15:prstTrans prst="pageCurlDouble"/>
       </p:transition>
     </mc:Choice>
-    <mc:Fallback>
+    <mc:Fallback xmlns="">
       <p:transition spd="slow">
         <p:fade/>
       </p:transition>
@@ -14033,9 +17318,17 @@
 </p:sld>
 </file>
 
-<file path=ppt/slides/slide12.xml><?xml version="1.0" encoding="utf-8"?>
+<file path=ppt/slides/slide16.xml><?xml version="1.0" encoding="utf-8"?>
 <p:sld xmlns:a="http://schemas.openxmlformats.org/drawingml/2006/main" xmlns:r="http://schemas.openxmlformats.org/officeDocument/2006/relationships" xmlns:p="http://schemas.openxmlformats.org/presentationml/2006/main">
   <p:cSld>
+    <p:bg>
+      <p:bgPr>
+        <a:solidFill>
+          <a:schemeClr val="lt1"/>
+        </a:solidFill>
+        <a:effectLst/>
+      </p:bgPr>
+    </p:bg>
     <p:spTree>
       <p:nvGrpSpPr>
         <p:cNvPr id="1" name="Shape 488">
@@ -14073,10 +17366,6 @@
           </p:nvPr>
         </p:nvSpPr>
         <p:spPr>
-          <a:xfrm>
-            <a:off x="720000" y="539500"/>
-            <a:ext cx="7704000" cy="572700"/>
-          </a:xfrm>
           <a:prstGeom prst="rect">
             <a:avLst/>
           </a:prstGeom>
@@ -14541,15 +17830,15 @@
     </p:extLst>
   </p:cSld>
   <p:clrMapOvr>
-    <a:masterClrMapping/>
+    <a:overrideClrMapping bg1="lt1" tx1="dk1" bg2="dk2" tx2="lt2" accent1="accent1" accent2="accent2" accent3="accent3" accent4="accent4" accent5="accent5" accent6="accent6" hlink="hlink" folHlink="folHlink"/>
   </p:clrMapOvr>
-  <mc:AlternateContent xmlns:mc="http://schemas.openxmlformats.org/markup-compatibility/2006">
-    <mc:Choice xmlns:p15="http://schemas.microsoft.com/office/powerpoint/2012/main" Requires="p15">
+  <mc:AlternateContent xmlns:mc="http://schemas.openxmlformats.org/markup-compatibility/2006" xmlns:p15="http://schemas.microsoft.com/office/powerpoint/2012/main">
+    <mc:Choice Requires="p15">
       <p:transition xmlns:p14="http://schemas.microsoft.com/office/powerpoint/2010/main" spd="slow" p14:dur="1250">
         <p15:prstTrans prst="pageCurlDouble"/>
       </p:transition>
     </mc:Choice>
-    <mc:Fallback>
+    <mc:Fallback xmlns="">
       <p:transition spd="slow">
         <p:fade/>
       </p:transition>
@@ -15421,6 +18710,627 @@
     <p:bldLst>
       <p:bldP spid="490" grpId="0"/>
       <p:bldP spid="5" grpId="0" build="p"/>
+    </p:bldLst>
+  </p:timing>
+</p:sld>
+</file>
+
+<file path=ppt/slides/slide17.xml><?xml version="1.0" encoding="utf-8"?>
+<p:sld xmlns:a="http://schemas.openxmlformats.org/drawingml/2006/main" xmlns:r="http://schemas.openxmlformats.org/officeDocument/2006/relationships" xmlns:p="http://schemas.openxmlformats.org/presentationml/2006/main">
+  <p:cSld>
+    <p:spTree>
+      <p:nvGrpSpPr>
+        <p:cNvPr id="1" name=""/>
+        <p:cNvGrpSpPr/>
+        <p:nvPr/>
+      </p:nvGrpSpPr>
+      <p:grpSpPr>
+        <a:xfrm>
+          <a:off x="0" y="0"/>
+          <a:ext cx="0" cy="0"/>
+          <a:chOff x="0" y="0"/>
+          <a:chExt cx="0" cy="0"/>
+        </a:xfrm>
+      </p:grpSpPr>
+      <p:sp>
+        <p:nvSpPr>
+          <p:cNvPr id="2" name="Google Shape;490;p47">
+            <a:extLst>
+              <a:ext uri="{FF2B5EF4-FFF2-40B4-BE49-F238E27FC236}">
+                <a16:creationId xmlns:a16="http://schemas.microsoft.com/office/drawing/2014/main" id="{1EA11F7F-5282-3FEC-B263-8DEB64F98D77}"/>
+              </a:ext>
+            </a:extLst>
+          </p:cNvPr>
+          <p:cNvSpPr txBox="1">
+            <a:spLocks/>
+          </p:cNvSpPr>
+          <p:nvPr/>
+        </p:nvSpPr>
+        <p:spPr>
+          <a:xfrm>
+            <a:off x="720000" y="539500"/>
+            <a:ext cx="7704000" cy="572700"/>
+          </a:xfrm>
+          <a:prstGeom prst="rect">
+            <a:avLst/>
+          </a:prstGeom>
+          <a:noFill/>
+          <a:ln>
+            <a:noFill/>
+          </a:ln>
+        </p:spPr>
+        <p:txBody>
+          <a:bodyPr spcFirstLastPara="1" wrap="square" lIns="91425" tIns="91425" rIns="91425" bIns="91425" anchor="t" anchorCtr="0">
+            <a:noAutofit/>
+          </a:bodyPr>
+          <a:lstStyle>
+            <a:defPPr marR="0" lvl="0" algn="l" rtl="0">
+              <a:lnSpc>
+                <a:spcPct val="100000"/>
+              </a:lnSpc>
+              <a:spcBef>
+                <a:spcPts val="0"/>
+              </a:spcBef>
+              <a:spcAft>
+                <a:spcPts val="0"/>
+              </a:spcAft>
+            </a:defPPr>
+            <a:lvl1pPr algn="ctr">
+              <a:buClr>
+                <a:schemeClr val="dk1"/>
+              </a:buClr>
+              <a:buSzPts val="3000"/>
+              <a:buFont typeface="Poppins"/>
+              <a:buNone/>
+              <a:defRPr sz="3000" b="1">
+                <a:solidFill>
+                  <a:schemeClr val="dk1"/>
+                </a:solidFill>
+                <a:latin typeface="Poppins"/>
+                <a:ea typeface="Poppins"/>
+                <a:cs typeface="Poppins"/>
+                <a:sym typeface="Poppins"/>
+              </a:defRPr>
+            </a:lvl1pPr>
+            <a:lvl2pPr>
+              <a:buClr>
+                <a:schemeClr val="dk1"/>
+              </a:buClr>
+              <a:buSzPts val="3000"/>
+              <a:buFont typeface="Poppins"/>
+              <a:buNone/>
+              <a:defRPr sz="3000" b="1">
+                <a:solidFill>
+                  <a:schemeClr val="dk1"/>
+                </a:solidFill>
+                <a:latin typeface="Poppins"/>
+                <a:ea typeface="Poppins"/>
+                <a:cs typeface="Poppins"/>
+                <a:sym typeface="Poppins"/>
+              </a:defRPr>
+            </a:lvl2pPr>
+            <a:lvl3pPr>
+              <a:buClr>
+                <a:schemeClr val="dk1"/>
+              </a:buClr>
+              <a:buSzPts val="3000"/>
+              <a:buFont typeface="Poppins"/>
+              <a:buNone/>
+              <a:defRPr sz="3000" b="1">
+                <a:solidFill>
+                  <a:schemeClr val="dk1"/>
+                </a:solidFill>
+                <a:latin typeface="Poppins"/>
+                <a:ea typeface="Poppins"/>
+                <a:cs typeface="Poppins"/>
+                <a:sym typeface="Poppins"/>
+              </a:defRPr>
+            </a:lvl3pPr>
+            <a:lvl4pPr>
+              <a:buClr>
+                <a:schemeClr val="dk1"/>
+              </a:buClr>
+              <a:buSzPts val="3000"/>
+              <a:buFont typeface="Poppins"/>
+              <a:buNone/>
+              <a:defRPr sz="3000" b="1">
+                <a:solidFill>
+                  <a:schemeClr val="dk1"/>
+                </a:solidFill>
+                <a:latin typeface="Poppins"/>
+                <a:ea typeface="Poppins"/>
+                <a:cs typeface="Poppins"/>
+                <a:sym typeface="Poppins"/>
+              </a:defRPr>
+            </a:lvl4pPr>
+            <a:lvl5pPr>
+              <a:buClr>
+                <a:schemeClr val="dk1"/>
+              </a:buClr>
+              <a:buSzPts val="3000"/>
+              <a:buFont typeface="Poppins"/>
+              <a:buNone/>
+              <a:defRPr sz="3000" b="1">
+                <a:solidFill>
+                  <a:schemeClr val="dk1"/>
+                </a:solidFill>
+                <a:latin typeface="Poppins"/>
+                <a:ea typeface="Poppins"/>
+                <a:cs typeface="Poppins"/>
+                <a:sym typeface="Poppins"/>
+              </a:defRPr>
+            </a:lvl5pPr>
+            <a:lvl6pPr>
+              <a:buClr>
+                <a:schemeClr val="dk1"/>
+              </a:buClr>
+              <a:buSzPts val="3000"/>
+              <a:buFont typeface="Poppins"/>
+              <a:buNone/>
+              <a:defRPr sz="3000" b="1">
+                <a:solidFill>
+                  <a:schemeClr val="dk1"/>
+                </a:solidFill>
+                <a:latin typeface="Poppins"/>
+                <a:ea typeface="Poppins"/>
+                <a:cs typeface="Poppins"/>
+                <a:sym typeface="Poppins"/>
+              </a:defRPr>
+            </a:lvl6pPr>
+            <a:lvl7pPr>
+              <a:buClr>
+                <a:schemeClr val="dk1"/>
+              </a:buClr>
+              <a:buSzPts val="3000"/>
+              <a:buFont typeface="Poppins"/>
+              <a:buNone/>
+              <a:defRPr sz="3000" b="1">
+                <a:solidFill>
+                  <a:schemeClr val="dk1"/>
+                </a:solidFill>
+                <a:latin typeface="Poppins"/>
+                <a:ea typeface="Poppins"/>
+                <a:cs typeface="Poppins"/>
+                <a:sym typeface="Poppins"/>
+              </a:defRPr>
+            </a:lvl7pPr>
+            <a:lvl8pPr>
+              <a:buClr>
+                <a:schemeClr val="dk1"/>
+              </a:buClr>
+              <a:buSzPts val="3000"/>
+              <a:buFont typeface="Poppins"/>
+              <a:buNone/>
+              <a:defRPr sz="3000" b="1">
+                <a:solidFill>
+                  <a:schemeClr val="dk1"/>
+                </a:solidFill>
+                <a:latin typeface="Poppins"/>
+                <a:ea typeface="Poppins"/>
+                <a:cs typeface="Poppins"/>
+                <a:sym typeface="Poppins"/>
+              </a:defRPr>
+            </a:lvl8pPr>
+            <a:lvl9pPr>
+              <a:buClr>
+                <a:schemeClr val="dk1"/>
+              </a:buClr>
+              <a:buSzPts val="3000"/>
+              <a:buFont typeface="Poppins"/>
+              <a:buNone/>
+              <a:defRPr sz="3000" b="1">
+                <a:solidFill>
+                  <a:schemeClr val="dk1"/>
+                </a:solidFill>
+                <a:latin typeface="Poppins"/>
+                <a:ea typeface="Poppins"/>
+                <a:cs typeface="Poppins"/>
+                <a:sym typeface="Poppins"/>
+              </a:defRPr>
+            </a:lvl9pPr>
+          </a:lstStyle>
+          <a:p>
+            <a:r>
+              <a:rPr lang="en-US" altLang="zh-CN" dirty="0"/>
+              <a:t>Visuals</a:t>
+            </a:r>
+            <a:endParaRPr lang="en-US" dirty="0"/>
+          </a:p>
+        </p:txBody>
+      </p:sp>
+      <p:pic>
+        <p:nvPicPr>
+          <p:cNvPr id="4" name="Picture 3">
+            <a:extLst>
+              <a:ext uri="{FF2B5EF4-FFF2-40B4-BE49-F238E27FC236}">
+                <a16:creationId xmlns:a16="http://schemas.microsoft.com/office/drawing/2014/main" id="{5C48C265-B91F-FF66-0212-626484D30FCD}"/>
+              </a:ext>
+            </a:extLst>
+          </p:cNvPr>
+          <p:cNvPicPr>
+            <a:picLocks noChangeAspect="1"/>
+          </p:cNvPicPr>
+          <p:nvPr/>
+        </p:nvPicPr>
+        <p:blipFill>
+          <a:blip r:embed="rId2"/>
+          <a:stretch>
+            <a:fillRect/>
+          </a:stretch>
+        </p:blipFill>
+        <p:spPr>
+          <a:xfrm>
+            <a:off x="1894901" y="1225282"/>
+            <a:ext cx="1828800" cy="1657350"/>
+          </a:xfrm>
+          <a:prstGeom prst="rect">
+            <a:avLst/>
+          </a:prstGeom>
+        </p:spPr>
+      </p:pic>
+      <p:pic>
+        <p:nvPicPr>
+          <p:cNvPr id="6" name="Picture 5">
+            <a:extLst>
+              <a:ext uri="{FF2B5EF4-FFF2-40B4-BE49-F238E27FC236}">
+                <a16:creationId xmlns:a16="http://schemas.microsoft.com/office/drawing/2014/main" id="{A7FCE39B-9767-5DB3-ED9E-9D0E59C0F1AE}"/>
+              </a:ext>
+            </a:extLst>
+          </p:cNvPr>
+          <p:cNvPicPr>
+            <a:picLocks noChangeAspect="1"/>
+          </p:cNvPicPr>
+          <p:nvPr/>
+        </p:nvPicPr>
+        <p:blipFill>
+          <a:blip r:embed="rId3"/>
+          <a:stretch>
+            <a:fillRect/>
+          </a:stretch>
+        </p:blipFill>
+        <p:spPr>
+          <a:xfrm>
+            <a:off x="5568051" y="1301482"/>
+            <a:ext cx="2238375" cy="1504950"/>
+          </a:xfrm>
+          <a:prstGeom prst="rect">
+            <a:avLst/>
+          </a:prstGeom>
+        </p:spPr>
+      </p:pic>
+      <p:pic>
+        <p:nvPicPr>
+          <p:cNvPr id="8" name="Picture 7">
+            <a:extLst>
+              <a:ext uri="{FF2B5EF4-FFF2-40B4-BE49-F238E27FC236}">
+                <a16:creationId xmlns:a16="http://schemas.microsoft.com/office/drawing/2014/main" id="{3E52A393-0374-7E65-7790-8472CF378423}"/>
+              </a:ext>
+            </a:extLst>
+          </p:cNvPr>
+          <p:cNvPicPr>
+            <a:picLocks noChangeAspect="1"/>
+          </p:cNvPicPr>
+          <p:nvPr/>
+        </p:nvPicPr>
+        <p:blipFill>
+          <a:blip r:embed="rId4"/>
+          <a:srcRect l="226"/>
+          <a:stretch>
+            <a:fillRect/>
+          </a:stretch>
+        </p:blipFill>
+        <p:spPr>
+          <a:xfrm>
+            <a:off x="2346592" y="2995714"/>
+            <a:ext cx="4450815" cy="1969813"/>
+          </a:xfrm>
+          <a:prstGeom prst="rect">
+            <a:avLst/>
+          </a:prstGeom>
+        </p:spPr>
+      </p:pic>
+    </p:spTree>
+    <p:extLst>
+      <p:ext uri="{BB962C8B-B14F-4D97-AF65-F5344CB8AC3E}">
+        <p14:creationId xmlns:p14="http://schemas.microsoft.com/office/powerpoint/2010/main" val="3886339225"/>
+      </p:ext>
+    </p:extLst>
+  </p:cSld>
+  <p:clrMapOvr>
+    <a:masterClrMapping/>
+  </p:clrMapOvr>
+  <p:timing>
+    <p:tnLst>
+      <p:par>
+        <p:cTn id="1" dur="indefinite" restart="never" nodeType="tmRoot">
+          <p:childTnLst>
+            <p:seq concurrent="1" nextAc="seek">
+              <p:cTn id="2" dur="indefinite" nodeType="mainSeq">
+                <p:childTnLst>
+                  <p:par>
+                    <p:cTn id="3" fill="hold">
+                      <p:stCondLst>
+                        <p:cond delay="indefinite"/>
+                        <p:cond evt="onBegin" delay="0">
+                          <p:tn val="2"/>
+                        </p:cond>
+                      </p:stCondLst>
+                      <p:childTnLst>
+                        <p:par>
+                          <p:cTn id="4" fill="hold">
+                            <p:stCondLst>
+                              <p:cond delay="0"/>
+                            </p:stCondLst>
+                            <p:childTnLst>
+                              <p:par>
+                                <p:cTn id="5" presetID="47" presetClass="entr" presetSubtype="0" fill="hold" grpId="0" nodeType="afterEffect">
+                                  <p:stCondLst>
+                                    <p:cond delay="0"/>
+                                  </p:stCondLst>
+                                  <p:childTnLst>
+                                    <p:set>
+                                      <p:cBhvr>
+                                        <p:cTn id="6" dur="1" fill="hold">
+                                          <p:stCondLst>
+                                            <p:cond delay="0"/>
+                                          </p:stCondLst>
+                                        </p:cTn>
+                                        <p:tgtEl>
+                                          <p:spTgt spid="2"/>
+                                        </p:tgtEl>
+                                        <p:attrNameLst>
+                                          <p:attrName>style.visibility</p:attrName>
+                                        </p:attrNameLst>
+                                      </p:cBhvr>
+                                      <p:to>
+                                        <p:strVal val="visible"/>
+                                      </p:to>
+                                    </p:set>
+                                    <p:animEffect transition="in" filter="fade">
+                                      <p:cBhvr>
+                                        <p:cTn id="7" dur="1000"/>
+                                        <p:tgtEl>
+                                          <p:spTgt spid="2"/>
+                                        </p:tgtEl>
+                                      </p:cBhvr>
+                                    </p:animEffect>
+                                    <p:anim calcmode="lin" valueType="num">
+                                      <p:cBhvr>
+                                        <p:cTn id="8" dur="1000" fill="hold"/>
+                                        <p:tgtEl>
+                                          <p:spTgt spid="2"/>
+                                        </p:tgtEl>
+                                        <p:attrNameLst>
+                                          <p:attrName>ppt_x</p:attrName>
+                                        </p:attrNameLst>
+                                      </p:cBhvr>
+                                      <p:tavLst>
+                                        <p:tav tm="0">
+                                          <p:val>
+                                            <p:strVal val="#ppt_x"/>
+                                          </p:val>
+                                        </p:tav>
+                                        <p:tav tm="100000">
+                                          <p:val>
+                                            <p:strVal val="#ppt_x"/>
+                                          </p:val>
+                                        </p:tav>
+                                      </p:tavLst>
+                                    </p:anim>
+                                    <p:anim calcmode="lin" valueType="num">
+                                      <p:cBhvr>
+                                        <p:cTn id="9" dur="1000" fill="hold"/>
+                                        <p:tgtEl>
+                                          <p:spTgt spid="2"/>
+                                        </p:tgtEl>
+                                        <p:attrNameLst>
+                                          <p:attrName>ppt_y</p:attrName>
+                                        </p:attrNameLst>
+                                      </p:cBhvr>
+                                      <p:tavLst>
+                                        <p:tav tm="0">
+                                          <p:val>
+                                            <p:strVal val="#ppt_y-.1"/>
+                                          </p:val>
+                                        </p:tav>
+                                        <p:tav tm="100000">
+                                          <p:val>
+                                            <p:strVal val="#ppt_y"/>
+                                          </p:val>
+                                        </p:tav>
+                                      </p:tavLst>
+                                    </p:anim>
+                                  </p:childTnLst>
+                                </p:cTn>
+                              </p:par>
+                            </p:childTnLst>
+                          </p:cTn>
+                        </p:par>
+                      </p:childTnLst>
+                    </p:cTn>
+                  </p:par>
+                  <p:par>
+                    <p:cTn id="10" fill="hold">
+                      <p:stCondLst>
+                        <p:cond delay="indefinite"/>
+                      </p:stCondLst>
+                      <p:childTnLst>
+                        <p:par>
+                          <p:cTn id="11" fill="hold">
+                            <p:stCondLst>
+                              <p:cond delay="0"/>
+                            </p:stCondLst>
+                            <p:childTnLst>
+                              <p:par>
+                                <p:cTn id="12" presetID="21" presetClass="entr" presetSubtype="1" fill="hold" nodeType="clickEffect">
+                                  <p:stCondLst>
+                                    <p:cond delay="0"/>
+                                  </p:stCondLst>
+                                  <p:childTnLst>
+                                    <p:set>
+                                      <p:cBhvr>
+                                        <p:cTn id="13" dur="1" fill="hold">
+                                          <p:stCondLst>
+                                            <p:cond delay="0"/>
+                                          </p:stCondLst>
+                                        </p:cTn>
+                                        <p:tgtEl>
+                                          <p:spTgt spid="4"/>
+                                        </p:tgtEl>
+                                        <p:attrNameLst>
+                                          <p:attrName>style.visibility</p:attrName>
+                                        </p:attrNameLst>
+                                      </p:cBhvr>
+                                      <p:to>
+                                        <p:strVal val="visible"/>
+                                      </p:to>
+                                    </p:set>
+                                    <p:animEffect transition="in" filter="wheel(1)">
+                                      <p:cBhvr>
+                                        <p:cTn id="14" dur="2000"/>
+                                        <p:tgtEl>
+                                          <p:spTgt spid="4"/>
+                                        </p:tgtEl>
+                                      </p:cBhvr>
+                                    </p:animEffect>
+                                  </p:childTnLst>
+                                </p:cTn>
+                              </p:par>
+                            </p:childTnLst>
+                          </p:cTn>
+                        </p:par>
+                      </p:childTnLst>
+                    </p:cTn>
+                  </p:par>
+                  <p:par>
+                    <p:cTn id="15" fill="hold">
+                      <p:stCondLst>
+                        <p:cond delay="indefinite"/>
+                      </p:stCondLst>
+                      <p:childTnLst>
+                        <p:par>
+                          <p:cTn id="16" fill="hold">
+                            <p:stCondLst>
+                              <p:cond delay="0"/>
+                            </p:stCondLst>
+                            <p:childTnLst>
+                              <p:par>
+                                <p:cTn id="17" presetID="21" presetClass="entr" presetSubtype="1" fill="hold" nodeType="clickEffect">
+                                  <p:stCondLst>
+                                    <p:cond delay="0"/>
+                                  </p:stCondLst>
+                                  <p:childTnLst>
+                                    <p:set>
+                                      <p:cBhvr>
+                                        <p:cTn id="18" dur="1" fill="hold">
+                                          <p:stCondLst>
+                                            <p:cond delay="0"/>
+                                          </p:stCondLst>
+                                        </p:cTn>
+                                        <p:tgtEl>
+                                          <p:spTgt spid="6"/>
+                                        </p:tgtEl>
+                                        <p:attrNameLst>
+                                          <p:attrName>style.visibility</p:attrName>
+                                        </p:attrNameLst>
+                                      </p:cBhvr>
+                                      <p:to>
+                                        <p:strVal val="visible"/>
+                                      </p:to>
+                                    </p:set>
+                                    <p:animEffect transition="in" filter="wheel(1)">
+                                      <p:cBhvr>
+                                        <p:cTn id="19" dur="2000"/>
+                                        <p:tgtEl>
+                                          <p:spTgt spid="6"/>
+                                        </p:tgtEl>
+                                      </p:cBhvr>
+                                    </p:animEffect>
+                                  </p:childTnLst>
+                                </p:cTn>
+                              </p:par>
+                            </p:childTnLst>
+                          </p:cTn>
+                        </p:par>
+                      </p:childTnLst>
+                    </p:cTn>
+                  </p:par>
+                  <p:par>
+                    <p:cTn id="20" fill="hold">
+                      <p:stCondLst>
+                        <p:cond delay="indefinite"/>
+                      </p:stCondLst>
+                      <p:childTnLst>
+                        <p:par>
+                          <p:cTn id="21" fill="hold">
+                            <p:stCondLst>
+                              <p:cond delay="0"/>
+                            </p:stCondLst>
+                            <p:childTnLst>
+                              <p:par>
+                                <p:cTn id="22" presetID="21" presetClass="entr" presetSubtype="1" fill="hold" nodeType="clickEffect">
+                                  <p:stCondLst>
+                                    <p:cond delay="0"/>
+                                  </p:stCondLst>
+                                  <p:childTnLst>
+                                    <p:set>
+                                      <p:cBhvr>
+                                        <p:cTn id="23" dur="1" fill="hold">
+                                          <p:stCondLst>
+                                            <p:cond delay="0"/>
+                                          </p:stCondLst>
+                                        </p:cTn>
+                                        <p:tgtEl>
+                                          <p:spTgt spid="8"/>
+                                        </p:tgtEl>
+                                        <p:attrNameLst>
+                                          <p:attrName>style.visibility</p:attrName>
+                                        </p:attrNameLst>
+                                      </p:cBhvr>
+                                      <p:to>
+                                        <p:strVal val="visible"/>
+                                      </p:to>
+                                    </p:set>
+                                    <p:animEffect transition="in" filter="wheel(1)">
+                                      <p:cBhvr>
+                                        <p:cTn id="24" dur="2000"/>
+                                        <p:tgtEl>
+                                          <p:spTgt spid="8"/>
+                                        </p:tgtEl>
+                                      </p:cBhvr>
+                                    </p:animEffect>
+                                  </p:childTnLst>
+                                </p:cTn>
+                              </p:par>
+                            </p:childTnLst>
+                          </p:cTn>
+                        </p:par>
+                      </p:childTnLst>
+                    </p:cTn>
+                  </p:par>
+                </p:childTnLst>
+              </p:cTn>
+              <p:prevCondLst>
+                <p:cond evt="onPrev" delay="0">
+                  <p:tgtEl>
+                    <p:sldTgt/>
+                  </p:tgtEl>
+                </p:cond>
+              </p:prevCondLst>
+              <p:nextCondLst>
+                <p:cond evt="onNext" delay="0">
+                  <p:tgtEl>
+                    <p:sldTgt/>
+                  </p:tgtEl>
+                </p:cond>
+              </p:nextCondLst>
+            </p:seq>
+          </p:childTnLst>
+        </p:cTn>
+      </p:par>
+    </p:tnLst>
+    <p:bldLst>
+      <p:bldP spid="2" grpId="0"/>
     </p:bldLst>
   </p:timing>
 </p:sld>
@@ -19315,13 +23225,13 @@
   <p:clrMapOvr>
     <a:masterClrMapping/>
   </p:clrMapOvr>
-  <mc:AlternateContent xmlns:mc="http://schemas.openxmlformats.org/markup-compatibility/2006">
-    <mc:Choice xmlns:p14="http://schemas.microsoft.com/office/powerpoint/2010/main" Requires="p14">
+  <mc:AlternateContent xmlns:mc="http://schemas.openxmlformats.org/markup-compatibility/2006" xmlns:p14="http://schemas.microsoft.com/office/powerpoint/2010/main">
+    <mc:Choice Requires="p14">
       <p:transition spd="slow" p14:dur="2000">
         <p14:prism isContent="1"/>
       </p:transition>
     </mc:Choice>
-    <mc:Fallback>
+    <mc:Fallback xmlns="">
       <p:transition spd="slow">
         <p:fade/>
       </p:transition>
@@ -22539,4 +26449,47 @@
   <a:objectDefaults/>
   <a:extraClrSchemeLst/>
 </a:theme>
+</file>
+
+<file path=ppt/theme/themeOverride1.xml><?xml version="1.0" encoding="utf-8"?>
+<a:themeOverride xmlns:a="http://schemas.openxmlformats.org/drawingml/2006/main">
+  <a:clrScheme name="Simple Light">
+    <a:dk1>
+      <a:srgbClr val="202A41"/>
+    </a:dk1>
+    <a:lt1>
+      <a:srgbClr val="FFFFFF"/>
+    </a:lt1>
+    <a:dk2>
+      <a:srgbClr val="516988"/>
+    </a:dk2>
+    <a:lt2>
+      <a:srgbClr val="D3E1F1"/>
+    </a:lt2>
+    <a:accent1>
+      <a:srgbClr val="90ABCE"/>
+    </a:accent1>
+    <a:accent2>
+      <a:srgbClr val="6E86A5"/>
+    </a:accent2>
+    <a:accent3>
+      <a:srgbClr val="F5F4F3"/>
+    </a:accent3>
+    <a:accent4>
+      <a:srgbClr val="FFFFFF"/>
+    </a:accent4>
+    <a:accent5>
+      <a:srgbClr val="FFFFFF"/>
+    </a:accent5>
+    <a:accent6>
+      <a:srgbClr val="FFFFFF"/>
+    </a:accent6>
+    <a:hlink>
+      <a:srgbClr val="202A41"/>
+    </a:hlink>
+    <a:folHlink>
+      <a:srgbClr val="0097A7"/>
+    </a:folHlink>
+  </a:clrScheme>
+</a:themeOverride>
 </file>